--- a/output_visuals/powerpoint/04_clearing_by_year_hansen.pptx
+++ b/output_visuals/powerpoint/04_clearing_by_year_hansen.pptx
@@ -2298,20 +2298,20 @@
           <p:spPr>
             <a:xfrm>
               <a:off x="1387826" y="5423503"/>
-              <a:ext cx="5184120" cy="0"/>
+              <a:ext cx="4203974" cy="0"/>
             </a:xfrm>
             <a:custGeom>
               <a:avLst/>
               <a:pathLst>
-                <a:path w="5184120" h="0">
+                <a:path w="4203974" h="0">
                   <a:moveTo>
                     <a:pt x="0" y="0"/>
                   </a:moveTo>
                   <a:lnTo>
-                    <a:pt x="5184120" y="0"/>
-                  </a:lnTo>
-                  <a:lnTo>
-                    <a:pt x="5184120" y="0"/>
+                    <a:pt x="4203974" y="0"/>
+                  </a:lnTo>
+                  <a:lnTo>
+                    <a:pt x="4203974" y="0"/>
                   </a:lnTo>
                 </a:path>
               </a:pathLst>
@@ -2341,20 +2341,20 @@
           <p:spPr>
             <a:xfrm>
               <a:off x="1387826" y="4703079"/>
-              <a:ext cx="5184120" cy="0"/>
+              <a:ext cx="4203974" cy="0"/>
             </a:xfrm>
             <a:custGeom>
               <a:avLst/>
               <a:pathLst>
-                <a:path w="5184120" h="0">
+                <a:path w="4203974" h="0">
                   <a:moveTo>
                     <a:pt x="0" y="0"/>
                   </a:moveTo>
                   <a:lnTo>
-                    <a:pt x="5184120" y="0"/>
-                  </a:lnTo>
-                  <a:lnTo>
-                    <a:pt x="5184120" y="0"/>
+                    <a:pt x="4203974" y="0"/>
+                  </a:lnTo>
+                  <a:lnTo>
+                    <a:pt x="4203974" y="0"/>
                   </a:lnTo>
                 </a:path>
               </a:pathLst>
@@ -2384,20 +2384,20 @@
           <p:spPr>
             <a:xfrm>
               <a:off x="1387826" y="3982655"/>
-              <a:ext cx="5184120" cy="0"/>
+              <a:ext cx="4203974" cy="0"/>
             </a:xfrm>
             <a:custGeom>
               <a:avLst/>
               <a:pathLst>
-                <a:path w="5184120" h="0">
+                <a:path w="4203974" h="0">
                   <a:moveTo>
                     <a:pt x="0" y="0"/>
                   </a:moveTo>
                   <a:lnTo>
-                    <a:pt x="5184120" y="0"/>
-                  </a:lnTo>
-                  <a:lnTo>
-                    <a:pt x="5184120" y="0"/>
+                    <a:pt x="4203974" y="0"/>
+                  </a:lnTo>
+                  <a:lnTo>
+                    <a:pt x="4203974" y="0"/>
                   </a:lnTo>
                 </a:path>
               </a:pathLst>
@@ -2427,20 +2427,20 @@
           <p:spPr>
             <a:xfrm>
               <a:off x="1387826" y="3262231"/>
-              <a:ext cx="5184120" cy="0"/>
+              <a:ext cx="4203974" cy="0"/>
             </a:xfrm>
             <a:custGeom>
               <a:avLst/>
               <a:pathLst>
-                <a:path w="5184120" h="0">
+                <a:path w="4203974" h="0">
                   <a:moveTo>
                     <a:pt x="0" y="0"/>
                   </a:moveTo>
                   <a:lnTo>
-                    <a:pt x="5184120" y="0"/>
-                  </a:lnTo>
-                  <a:lnTo>
-                    <a:pt x="5184120" y="0"/>
+                    <a:pt x="4203974" y="0"/>
+                  </a:lnTo>
+                  <a:lnTo>
+                    <a:pt x="4203974" y="0"/>
                   </a:lnTo>
                 </a:path>
               </a:pathLst>
@@ -2470,20 +2470,20 @@
           <p:spPr>
             <a:xfrm>
               <a:off x="1387826" y="2541807"/>
-              <a:ext cx="5184120" cy="0"/>
+              <a:ext cx="4203974" cy="0"/>
             </a:xfrm>
             <a:custGeom>
               <a:avLst/>
               <a:pathLst>
-                <a:path w="5184120" h="0">
+                <a:path w="4203974" h="0">
                   <a:moveTo>
                     <a:pt x="0" y="0"/>
                   </a:moveTo>
                   <a:lnTo>
-                    <a:pt x="5184120" y="0"/>
-                  </a:lnTo>
-                  <a:lnTo>
-                    <a:pt x="5184120" y="0"/>
+                    <a:pt x="4203974" y="0"/>
+                  </a:lnTo>
+                  <a:lnTo>
+                    <a:pt x="4203974" y="0"/>
                   </a:lnTo>
                 </a:path>
               </a:pathLst>
@@ -2513,20 +2513,20 @@
           <p:spPr>
             <a:xfrm>
               <a:off x="1387826" y="1821383"/>
-              <a:ext cx="5184120" cy="0"/>
+              <a:ext cx="4203974" cy="0"/>
             </a:xfrm>
             <a:custGeom>
               <a:avLst/>
               <a:pathLst>
-                <a:path w="5184120" h="0">
+                <a:path w="4203974" h="0">
                   <a:moveTo>
                     <a:pt x="0" y="0"/>
                   </a:moveTo>
                   <a:lnTo>
-                    <a:pt x="5184120" y="0"/>
-                  </a:lnTo>
-                  <a:lnTo>
-                    <a:pt x="5184120" y="0"/>
+                    <a:pt x="4203974" y="0"/>
+                  </a:lnTo>
+                  <a:lnTo>
+                    <a:pt x="4203974" y="0"/>
                   </a:lnTo>
                 </a:path>
               </a:pathLst>
@@ -2555,7 +2555,7 @@
           </p:nvSpPr>
           <p:spPr>
             <a:xfrm>
-              <a:off x="1623468" y="1681489"/>
+              <a:off x="1578916" y="1681489"/>
               <a:ext cx="0" cy="3920204"/>
             </a:xfrm>
             <a:custGeom>
@@ -2598,7 +2598,7 @@
           </p:nvSpPr>
           <p:spPr>
             <a:xfrm>
-              <a:off x="2147117" y="1681489"/>
+              <a:off x="2003560" y="1681489"/>
               <a:ext cx="0" cy="3920204"/>
             </a:xfrm>
             <a:custGeom>
@@ -2641,7 +2641,7 @@
           </p:nvSpPr>
           <p:spPr>
             <a:xfrm>
-              <a:off x="2670765" y="1681489"/>
+              <a:off x="2428204" y="1681489"/>
               <a:ext cx="0" cy="3920204"/>
             </a:xfrm>
             <a:custGeom>
@@ -2684,7 +2684,7 @@
           </p:nvSpPr>
           <p:spPr>
             <a:xfrm>
-              <a:off x="3194414" y="1681489"/>
+              <a:off x="2852848" y="1681489"/>
               <a:ext cx="0" cy="3920204"/>
             </a:xfrm>
             <a:custGeom>
@@ -2727,7 +2727,7 @@
           </p:nvSpPr>
           <p:spPr>
             <a:xfrm>
-              <a:off x="3718062" y="1681489"/>
+              <a:off x="3277492" y="1681489"/>
               <a:ext cx="0" cy="3920204"/>
             </a:xfrm>
             <a:custGeom>
@@ -2770,7 +2770,7 @@
           </p:nvSpPr>
           <p:spPr>
             <a:xfrm>
-              <a:off x="4241711" y="1681489"/>
+              <a:off x="3702136" y="1681489"/>
               <a:ext cx="0" cy="3920204"/>
             </a:xfrm>
             <a:custGeom>
@@ -2813,7 +2813,7 @@
           </p:nvSpPr>
           <p:spPr>
             <a:xfrm>
-              <a:off x="4765359" y="1681489"/>
+              <a:off x="4126780" y="1681489"/>
               <a:ext cx="0" cy="3920204"/>
             </a:xfrm>
             <a:custGeom>
@@ -2856,7 +2856,7 @@
           </p:nvSpPr>
           <p:spPr>
             <a:xfrm>
-              <a:off x="5289008" y="1681489"/>
+              <a:off x="4551424" y="1681489"/>
               <a:ext cx="0" cy="3920204"/>
             </a:xfrm>
             <a:custGeom>
@@ -2899,7 +2899,7 @@
           </p:nvSpPr>
           <p:spPr>
             <a:xfrm>
-              <a:off x="5812656" y="1681489"/>
+              <a:off x="4976067" y="1681489"/>
               <a:ext cx="0" cy="3920204"/>
             </a:xfrm>
             <a:custGeom>
@@ -2942,7 +2942,7 @@
           </p:nvSpPr>
           <p:spPr>
             <a:xfrm>
-              <a:off x="6336305" y="1681489"/>
+              <a:off x="5400711" y="1681489"/>
               <a:ext cx="0" cy="3920204"/>
             </a:xfrm>
             <a:custGeom>
@@ -2985,42 +2985,42 @@
           </p:nvSpPr>
           <p:spPr>
             <a:xfrm>
-              <a:off x="1623468" y="1971831"/>
-              <a:ext cx="4712836" cy="3010064"/>
+              <a:off x="1578916" y="1971831"/>
+              <a:ext cx="3821795" cy="3010064"/>
             </a:xfrm>
             <a:custGeom>
               <a:avLst/>
               <a:pathLst>
-                <a:path w="4712836" h="3010064">
+                <a:path w="3821795" h="3010064">
                   <a:moveTo>
                     <a:pt x="0" y="3010064"/>
                   </a:moveTo>
                   <a:lnTo>
-                    <a:pt x="523648" y="2593290"/>
-                  </a:lnTo>
-                  <a:lnTo>
-                    <a:pt x="1047297" y="2802791"/>
-                  </a:lnTo>
-                  <a:lnTo>
-                    <a:pt x="1570945" y="2793240"/>
-                  </a:lnTo>
-                  <a:lnTo>
-                    <a:pt x="2094594" y="2108063"/>
-                  </a:lnTo>
-                  <a:lnTo>
-                    <a:pt x="2618242" y="2079408"/>
-                  </a:lnTo>
-                  <a:lnTo>
-                    <a:pt x="3141891" y="2353542"/>
-                  </a:lnTo>
-                  <a:lnTo>
-                    <a:pt x="3665539" y="1073612"/>
-                  </a:lnTo>
-                  <a:lnTo>
-                    <a:pt x="4189188" y="0"/>
-                  </a:lnTo>
-                  <a:lnTo>
-                    <a:pt x="4712836" y="2729880"/>
+                    <a:pt x="424643" y="2593290"/>
+                  </a:lnTo>
+                  <a:lnTo>
+                    <a:pt x="849287" y="2802791"/>
+                  </a:lnTo>
+                  <a:lnTo>
+                    <a:pt x="1273931" y="2793240"/>
+                  </a:lnTo>
+                  <a:lnTo>
+                    <a:pt x="1698575" y="2108063"/>
+                  </a:lnTo>
+                  <a:lnTo>
+                    <a:pt x="2123219" y="2079408"/>
+                  </a:lnTo>
+                  <a:lnTo>
+                    <a:pt x="2547863" y="2353542"/>
+                  </a:lnTo>
+                  <a:lnTo>
+                    <a:pt x="2972507" y="1073612"/>
+                  </a:lnTo>
+                  <a:lnTo>
+                    <a:pt x="3397151" y="0"/>
+                  </a:lnTo>
+                  <a:lnTo>
+                    <a:pt x="3821795" y="2729880"/>
                   </a:lnTo>
                 </a:path>
               </a:pathLst>
@@ -3049,42 +3049,42 @@
           </p:nvSpPr>
           <p:spPr>
             <a:xfrm>
-              <a:off x="1623468" y="2181664"/>
-              <a:ext cx="4712836" cy="3241838"/>
+              <a:off x="1578916" y="2181664"/>
+              <a:ext cx="3821795" cy="3241838"/>
             </a:xfrm>
             <a:custGeom>
               <a:avLst/>
               <a:pathLst>
-                <a:path w="4712836" h="3241838">
+                <a:path w="3821795" h="3241838">
                   <a:moveTo>
                     <a:pt x="0" y="3140531"/>
                   </a:moveTo>
                   <a:lnTo>
-                    <a:pt x="523648" y="2869066"/>
-                  </a:lnTo>
-                  <a:lnTo>
-                    <a:pt x="1047297" y="2231714"/>
-                  </a:lnTo>
-                  <a:lnTo>
-                    <a:pt x="1570945" y="2101883"/>
-                  </a:lnTo>
-                  <a:lnTo>
-                    <a:pt x="2094594" y="1382895"/>
-                  </a:lnTo>
-                  <a:lnTo>
-                    <a:pt x="2618242" y="0"/>
-                  </a:lnTo>
-                  <a:lnTo>
-                    <a:pt x="3141891" y="424901"/>
-                  </a:lnTo>
-                  <a:lnTo>
-                    <a:pt x="3665539" y="2554324"/>
-                  </a:lnTo>
-                  <a:lnTo>
-                    <a:pt x="4189188" y="3239871"/>
-                  </a:lnTo>
-                  <a:lnTo>
-                    <a:pt x="4712836" y="3241838"/>
+                    <a:pt x="424643" y="2869066"/>
+                  </a:lnTo>
+                  <a:lnTo>
+                    <a:pt x="849287" y="2231714"/>
+                  </a:lnTo>
+                  <a:lnTo>
+                    <a:pt x="1273931" y="2101883"/>
+                  </a:lnTo>
+                  <a:lnTo>
+                    <a:pt x="1698575" y="1382895"/>
+                  </a:lnTo>
+                  <a:lnTo>
+                    <a:pt x="2123219" y="0"/>
+                  </a:lnTo>
+                  <a:lnTo>
+                    <a:pt x="2547863" y="424901"/>
+                  </a:lnTo>
+                  <a:lnTo>
+                    <a:pt x="2972507" y="2554324"/>
+                  </a:lnTo>
+                  <a:lnTo>
+                    <a:pt x="3397151" y="3239871"/>
+                  </a:lnTo>
+                  <a:lnTo>
+                    <a:pt x="3821795" y="3241838"/>
                   </a:lnTo>
                 </a:path>
               </a:pathLst>
@@ -3113,42 +3113,42 @@
           </p:nvSpPr>
           <p:spPr>
             <a:xfrm>
-              <a:off x="1623468" y="1859680"/>
-              <a:ext cx="4712836" cy="3496896"/>
+              <a:off x="1578916" y="1859680"/>
+              <a:ext cx="3821795" cy="3496896"/>
             </a:xfrm>
             <a:custGeom>
               <a:avLst/>
               <a:pathLst>
-                <a:path w="4712836" h="3496896">
+                <a:path w="3821795" h="3496896">
                   <a:moveTo>
                     <a:pt x="0" y="2768143"/>
                   </a:moveTo>
                   <a:lnTo>
-                    <a:pt x="523648" y="2913150"/>
-                  </a:lnTo>
-                  <a:lnTo>
-                    <a:pt x="1047297" y="2572942"/>
-                  </a:lnTo>
-                  <a:lnTo>
-                    <a:pt x="1570945" y="509383"/>
-                  </a:lnTo>
-                  <a:lnTo>
-                    <a:pt x="2094594" y="3067453"/>
-                  </a:lnTo>
-                  <a:lnTo>
-                    <a:pt x="2618242" y="3496896"/>
-                  </a:lnTo>
-                  <a:lnTo>
-                    <a:pt x="3141891" y="2528324"/>
-                  </a:lnTo>
-                  <a:lnTo>
-                    <a:pt x="3665539" y="819846"/>
-                  </a:lnTo>
-                  <a:lnTo>
-                    <a:pt x="4189188" y="2463257"/>
-                  </a:lnTo>
-                  <a:lnTo>
-                    <a:pt x="4712836" y="0"/>
+                    <a:pt x="424643" y="2913150"/>
+                  </a:lnTo>
+                  <a:lnTo>
+                    <a:pt x="849287" y="2572942"/>
+                  </a:lnTo>
+                  <a:lnTo>
+                    <a:pt x="1273931" y="509383"/>
+                  </a:lnTo>
+                  <a:lnTo>
+                    <a:pt x="1698575" y="3067453"/>
+                  </a:lnTo>
+                  <a:lnTo>
+                    <a:pt x="2123219" y="3496896"/>
+                  </a:lnTo>
+                  <a:lnTo>
+                    <a:pt x="2547863" y="2528324"/>
+                  </a:lnTo>
+                  <a:lnTo>
+                    <a:pt x="2972507" y="819846"/>
+                  </a:lnTo>
+                  <a:lnTo>
+                    <a:pt x="3397151" y="2463257"/>
+                  </a:lnTo>
+                  <a:lnTo>
+                    <a:pt x="3821795" y="0"/>
                   </a:lnTo>
                 </a:path>
               </a:pathLst>
@@ -3177,48 +3177,176 @@
           </p:nvSpPr>
           <p:spPr>
             <a:xfrm>
-              <a:off x="1623468" y="4918668"/>
-              <a:ext cx="4712836" cy="463379"/>
+              <a:off x="1578916" y="3447307"/>
+              <a:ext cx="3821795" cy="1976195"/>
             </a:xfrm>
             <a:custGeom>
               <a:avLst/>
               <a:pathLst>
-                <a:path w="4712836" h="463379">
+                <a:path w="3821795" h="1976195">
                   <a:moveTo>
-                    <a:pt x="0" y="420871"/>
+                    <a:pt x="0" y="1970278"/>
                   </a:moveTo>
                   <a:lnTo>
-                    <a:pt x="523648" y="239594"/>
-                  </a:lnTo>
-                  <a:lnTo>
-                    <a:pt x="1047297" y="274374"/>
-                  </a:lnTo>
-                  <a:lnTo>
-                    <a:pt x="1570945" y="0"/>
-                  </a:lnTo>
-                  <a:lnTo>
-                    <a:pt x="2094594" y="359391"/>
-                  </a:lnTo>
-                  <a:lnTo>
-                    <a:pt x="2618242" y="244512"/>
-                  </a:lnTo>
-                  <a:lnTo>
-                    <a:pt x="3141891" y="268753"/>
-                  </a:lnTo>
-                  <a:lnTo>
-                    <a:pt x="3665539" y="41103"/>
-                  </a:lnTo>
-                  <a:lnTo>
-                    <a:pt x="4189188" y="397333"/>
-                  </a:lnTo>
-                  <a:lnTo>
-                    <a:pt x="4712836" y="463379"/>
+                    <a:pt x="424643" y="1964362"/>
+                  </a:lnTo>
+                  <a:lnTo>
+                    <a:pt x="849287" y="1976195"/>
+                  </a:lnTo>
+                  <a:lnTo>
+                    <a:pt x="1273931" y="1976195"/>
+                  </a:lnTo>
+                  <a:lnTo>
+                    <a:pt x="1698575" y="1976195"/>
+                  </a:lnTo>
+                  <a:lnTo>
+                    <a:pt x="2123219" y="1958445"/>
+                  </a:lnTo>
+                  <a:lnTo>
+                    <a:pt x="2547863" y="1970278"/>
+                  </a:lnTo>
+                  <a:lnTo>
+                    <a:pt x="2972507" y="544341"/>
+                  </a:lnTo>
+                  <a:lnTo>
+                    <a:pt x="3397151" y="698176"/>
+                  </a:lnTo>
+                  <a:lnTo>
+                    <a:pt x="3821795" y="0"/>
                   </a:lnTo>
                 </a:path>
               </a:pathLst>
             </a:custGeom>
             <a:ln w="35231" cap="flat">
               <a:solidFill>
+                <a:srgbClr val="E7298A">
+                  <a:alpha val="100000"/>
+                </a:srgbClr>
+              </a:solidFill>
+              <a:prstDash val="solid"/>
+              <a:round/>
+            </a:ln>
+          </p:spPr>
+          <p:txBody>
+            <a:bodyPr/>
+            <a:lstStyle/>
+            <a:p/>
+          </p:txBody>
+        </p:sp>
+        <p:sp>
+          <p:nvSpPr>
+            <p:cNvPr id="25" name="pl25"/>
+            <p:cNvSpPr/>
+            <p:nvPr/>
+          </p:nvSpPr>
+          <p:spPr>
+            <a:xfrm>
+              <a:off x="1578916" y="4932326"/>
+              <a:ext cx="3821795" cy="491176"/>
+            </a:xfrm>
+            <a:custGeom>
+              <a:avLst/>
+              <a:pathLst>
+                <a:path w="3821795" h="491176">
+                  <a:moveTo>
+                    <a:pt x="0" y="491176"/>
+                  </a:moveTo>
+                  <a:lnTo>
+                    <a:pt x="424643" y="491176"/>
+                  </a:lnTo>
+                  <a:lnTo>
+                    <a:pt x="849287" y="491176"/>
+                  </a:lnTo>
+                  <a:lnTo>
+                    <a:pt x="1273931" y="358936"/>
+                  </a:lnTo>
+                  <a:lnTo>
+                    <a:pt x="1698575" y="472285"/>
+                  </a:lnTo>
+                  <a:lnTo>
+                    <a:pt x="2123219" y="491176"/>
+                  </a:lnTo>
+                  <a:lnTo>
+                    <a:pt x="2547863" y="491176"/>
+                  </a:lnTo>
+                  <a:lnTo>
+                    <a:pt x="2972507" y="491176"/>
+                  </a:lnTo>
+                  <a:lnTo>
+                    <a:pt x="3397151" y="0"/>
+                  </a:lnTo>
+                  <a:lnTo>
+                    <a:pt x="3821795" y="434502"/>
+                  </a:lnTo>
+                </a:path>
+              </a:pathLst>
+            </a:custGeom>
+            <a:ln w="35231" cap="flat">
+              <a:solidFill>
+                <a:srgbClr val="F0C419">
+                  <a:alpha val="100000"/>
+                </a:srgbClr>
+              </a:solidFill>
+              <a:prstDash val="solid"/>
+              <a:round/>
+            </a:ln>
+          </p:spPr>
+          <p:txBody>
+            <a:bodyPr/>
+            <a:lstStyle/>
+            <a:p/>
+          </p:txBody>
+        </p:sp>
+        <p:sp>
+          <p:nvSpPr>
+            <p:cNvPr id="26" name="pl26"/>
+            <p:cNvSpPr/>
+            <p:nvPr/>
+          </p:nvSpPr>
+          <p:spPr>
+            <a:xfrm>
+              <a:off x="1578916" y="4918668"/>
+              <a:ext cx="3821795" cy="463379"/>
+            </a:xfrm>
+            <a:custGeom>
+              <a:avLst/>
+              <a:pathLst>
+                <a:path w="3821795" h="463379">
+                  <a:moveTo>
+                    <a:pt x="0" y="420871"/>
+                  </a:moveTo>
+                  <a:lnTo>
+                    <a:pt x="424643" y="239594"/>
+                  </a:lnTo>
+                  <a:lnTo>
+                    <a:pt x="849287" y="274374"/>
+                  </a:lnTo>
+                  <a:lnTo>
+                    <a:pt x="1273931" y="0"/>
+                  </a:lnTo>
+                  <a:lnTo>
+                    <a:pt x="1698575" y="359391"/>
+                  </a:lnTo>
+                  <a:lnTo>
+                    <a:pt x="2123219" y="244512"/>
+                  </a:lnTo>
+                  <a:lnTo>
+                    <a:pt x="2547863" y="268753"/>
+                  </a:lnTo>
+                  <a:lnTo>
+                    <a:pt x="2972507" y="41103"/>
+                  </a:lnTo>
+                  <a:lnTo>
+                    <a:pt x="3397151" y="397333"/>
+                  </a:lnTo>
+                  <a:lnTo>
+                    <a:pt x="3821795" y="463379"/>
+                  </a:lnTo>
+                </a:path>
+              </a:pathLst>
+            </a:custGeom>
+            <a:ln w="35231" cap="flat">
+              <a:solidFill>
                 <a:srgbClr val="D2B48C">
                   <a:alpha val="100000"/>
                 </a:srgbClr>
@@ -3235,13 +3363,13 @@
         </p:sp>
         <p:sp>
           <p:nvSpPr>
-            <p:cNvPr id="25" name="pt25"/>
-            <p:cNvSpPr/>
-            <p:nvPr/>
-          </p:nvSpPr>
-          <p:spPr>
-            <a:xfrm>
-              <a:off x="1586293" y="4944720"/>
+            <p:cNvPr id="27" name="pt27"/>
+            <p:cNvSpPr/>
+            <p:nvPr/>
+          </p:nvSpPr>
+          <p:spPr>
+            <a:xfrm>
+              <a:off x="1541741" y="4944720"/>
               <a:ext cx="74350" cy="74350"/>
             </a:xfrm>
             <a:prstGeom prst="ellipse">
@@ -3270,13 +3398,13 @@
         </p:sp>
         <p:sp>
           <p:nvSpPr>
-            <p:cNvPr id="26" name="pt26"/>
-            <p:cNvSpPr/>
-            <p:nvPr/>
-          </p:nvSpPr>
-          <p:spPr>
-            <a:xfrm>
-              <a:off x="2109942" y="4527947"/>
+            <p:cNvPr id="28" name="pt28"/>
+            <p:cNvSpPr/>
+            <p:nvPr/>
+          </p:nvSpPr>
+          <p:spPr>
+            <a:xfrm>
+              <a:off x="1966385" y="4527947"/>
               <a:ext cx="74350" cy="74350"/>
             </a:xfrm>
             <a:prstGeom prst="ellipse">
@@ -3305,13 +3433,13 @@
         </p:sp>
         <p:sp>
           <p:nvSpPr>
-            <p:cNvPr id="27" name="pt27"/>
-            <p:cNvSpPr/>
-            <p:nvPr/>
-          </p:nvSpPr>
-          <p:spPr>
-            <a:xfrm>
-              <a:off x="2633590" y="4737448"/>
+            <p:cNvPr id="29" name="pt29"/>
+            <p:cNvSpPr/>
+            <p:nvPr/>
+          </p:nvSpPr>
+          <p:spPr>
+            <a:xfrm>
+              <a:off x="2391029" y="4737448"/>
               <a:ext cx="74350" cy="74350"/>
             </a:xfrm>
             <a:prstGeom prst="ellipse">
@@ -3340,13 +3468,13 @@
         </p:sp>
         <p:sp>
           <p:nvSpPr>
-            <p:cNvPr id="28" name="pt28"/>
-            <p:cNvSpPr/>
-            <p:nvPr/>
-          </p:nvSpPr>
-          <p:spPr>
-            <a:xfrm>
-              <a:off x="3157239" y="4727896"/>
+            <p:cNvPr id="30" name="pt30"/>
+            <p:cNvSpPr/>
+            <p:nvPr/>
+          </p:nvSpPr>
+          <p:spPr>
+            <a:xfrm>
+              <a:off x="2815673" y="4727896"/>
               <a:ext cx="74350" cy="74350"/>
             </a:xfrm>
             <a:prstGeom prst="ellipse">
@@ -3375,13 +3503,13 @@
         </p:sp>
         <p:sp>
           <p:nvSpPr>
-            <p:cNvPr id="29" name="pt29"/>
-            <p:cNvSpPr/>
-            <p:nvPr/>
-          </p:nvSpPr>
-          <p:spPr>
-            <a:xfrm>
-              <a:off x="3680887" y="4042719"/>
+            <p:cNvPr id="31" name="pt31"/>
+            <p:cNvSpPr/>
+            <p:nvPr/>
+          </p:nvSpPr>
+          <p:spPr>
+            <a:xfrm>
+              <a:off x="3240317" y="4042719"/>
               <a:ext cx="74350" cy="74350"/>
             </a:xfrm>
             <a:prstGeom prst="ellipse">
@@ -3410,13 +3538,13 @@
         </p:sp>
         <p:sp>
           <p:nvSpPr>
-            <p:cNvPr id="30" name="pt30"/>
-            <p:cNvSpPr/>
-            <p:nvPr/>
-          </p:nvSpPr>
-          <p:spPr>
-            <a:xfrm>
-              <a:off x="4204536" y="4014064"/>
+            <p:cNvPr id="32" name="pt32"/>
+            <p:cNvSpPr/>
+            <p:nvPr/>
+          </p:nvSpPr>
+          <p:spPr>
+            <a:xfrm>
+              <a:off x="3664961" y="4014064"/>
               <a:ext cx="74350" cy="74350"/>
             </a:xfrm>
             <a:prstGeom prst="ellipse">
@@ -3445,13 +3573,13 @@
         </p:sp>
         <p:sp>
           <p:nvSpPr>
-            <p:cNvPr id="31" name="pt31"/>
-            <p:cNvSpPr/>
-            <p:nvPr/>
-          </p:nvSpPr>
-          <p:spPr>
-            <a:xfrm>
-              <a:off x="4728184" y="4288199"/>
+            <p:cNvPr id="33" name="pt33"/>
+            <p:cNvSpPr/>
+            <p:nvPr/>
+          </p:nvSpPr>
+          <p:spPr>
+            <a:xfrm>
+              <a:off x="4089605" y="4288199"/>
               <a:ext cx="74350" cy="74350"/>
             </a:xfrm>
             <a:prstGeom prst="ellipse">
@@ -3480,13 +3608,13 @@
         </p:sp>
         <p:sp>
           <p:nvSpPr>
-            <p:cNvPr id="32" name="pt32"/>
-            <p:cNvSpPr/>
-            <p:nvPr/>
-          </p:nvSpPr>
-          <p:spPr>
-            <a:xfrm>
-              <a:off x="5251833" y="3008269"/>
+            <p:cNvPr id="34" name="pt34"/>
+            <p:cNvSpPr/>
+            <p:nvPr/>
+          </p:nvSpPr>
+          <p:spPr>
+            <a:xfrm>
+              <a:off x="4514249" y="3008269"/>
               <a:ext cx="74350" cy="74350"/>
             </a:xfrm>
             <a:prstGeom prst="ellipse">
@@ -3515,13 +3643,13 @@
         </p:sp>
         <p:sp>
           <p:nvSpPr>
-            <p:cNvPr id="33" name="pt33"/>
-            <p:cNvSpPr/>
-            <p:nvPr/>
-          </p:nvSpPr>
-          <p:spPr>
-            <a:xfrm>
-              <a:off x="5775481" y="1934656"/>
+            <p:cNvPr id="35" name="pt35"/>
+            <p:cNvSpPr/>
+            <p:nvPr/>
+          </p:nvSpPr>
+          <p:spPr>
+            <a:xfrm>
+              <a:off x="4938892" y="1934656"/>
               <a:ext cx="74350" cy="74350"/>
             </a:xfrm>
             <a:prstGeom prst="ellipse">
@@ -3550,13 +3678,13 @@
         </p:sp>
         <p:sp>
           <p:nvSpPr>
-            <p:cNvPr id="34" name="pt34"/>
-            <p:cNvSpPr/>
-            <p:nvPr/>
-          </p:nvSpPr>
-          <p:spPr>
-            <a:xfrm>
-              <a:off x="6299130" y="4664536"/>
+            <p:cNvPr id="36" name="pt36"/>
+            <p:cNvSpPr/>
+            <p:nvPr/>
+          </p:nvSpPr>
+          <p:spPr>
+            <a:xfrm>
+              <a:off x="5363536" y="4664536"/>
               <a:ext cx="74350" cy="74350"/>
             </a:xfrm>
             <a:prstGeom prst="ellipse">
@@ -3585,13 +3713,713 @@
         </p:sp>
         <p:sp>
           <p:nvSpPr>
-            <p:cNvPr id="35" name="pt35"/>
-            <p:cNvSpPr/>
-            <p:nvPr/>
-          </p:nvSpPr>
-          <p:spPr>
-            <a:xfrm>
-              <a:off x="1586293" y="5302364"/>
+            <p:cNvPr id="37" name="pt37"/>
+            <p:cNvSpPr/>
+            <p:nvPr/>
+          </p:nvSpPr>
+          <p:spPr>
+            <a:xfrm>
+              <a:off x="1541741" y="5386328"/>
+              <a:ext cx="74350" cy="74350"/>
+            </a:xfrm>
+            <a:prstGeom prst="ellipse">
+              <a:avLst/>
+            </a:prstGeom>
+            <a:solidFill>
+              <a:srgbClr val="F0C419">
+                <a:alpha val="100000"/>
+              </a:srgbClr>
+            </a:solidFill>
+            <a:ln w="14727" cap="rnd">
+              <a:solidFill>
+                <a:srgbClr val="F0C419">
+                  <a:alpha val="100000"/>
+                </a:srgbClr>
+              </a:solidFill>
+              <a:prstDash val="solid"/>
+              <a:round/>
+            </a:ln>
+          </p:spPr>
+          <p:txBody>
+            <a:bodyPr/>
+            <a:lstStyle/>
+            <a:p/>
+          </p:txBody>
+        </p:sp>
+        <p:sp>
+          <p:nvSpPr>
+            <p:cNvPr id="38" name="pt38"/>
+            <p:cNvSpPr/>
+            <p:nvPr/>
+          </p:nvSpPr>
+          <p:spPr>
+            <a:xfrm>
+              <a:off x="1966385" y="5386328"/>
+              <a:ext cx="74350" cy="74350"/>
+            </a:xfrm>
+            <a:prstGeom prst="ellipse">
+              <a:avLst/>
+            </a:prstGeom>
+            <a:solidFill>
+              <a:srgbClr val="F0C419">
+                <a:alpha val="100000"/>
+              </a:srgbClr>
+            </a:solidFill>
+            <a:ln w="14727" cap="rnd">
+              <a:solidFill>
+                <a:srgbClr val="F0C419">
+                  <a:alpha val="100000"/>
+                </a:srgbClr>
+              </a:solidFill>
+              <a:prstDash val="solid"/>
+              <a:round/>
+            </a:ln>
+          </p:spPr>
+          <p:txBody>
+            <a:bodyPr/>
+            <a:lstStyle/>
+            <a:p/>
+          </p:txBody>
+        </p:sp>
+        <p:sp>
+          <p:nvSpPr>
+            <p:cNvPr id="39" name="pt39"/>
+            <p:cNvSpPr/>
+            <p:nvPr/>
+          </p:nvSpPr>
+          <p:spPr>
+            <a:xfrm>
+              <a:off x="2391029" y="5386328"/>
+              <a:ext cx="74350" cy="74350"/>
+            </a:xfrm>
+            <a:prstGeom prst="ellipse">
+              <a:avLst/>
+            </a:prstGeom>
+            <a:solidFill>
+              <a:srgbClr val="F0C419">
+                <a:alpha val="100000"/>
+              </a:srgbClr>
+            </a:solidFill>
+            <a:ln w="14727" cap="rnd">
+              <a:solidFill>
+                <a:srgbClr val="F0C419">
+                  <a:alpha val="100000"/>
+                </a:srgbClr>
+              </a:solidFill>
+              <a:prstDash val="solid"/>
+              <a:round/>
+            </a:ln>
+          </p:spPr>
+          <p:txBody>
+            <a:bodyPr/>
+            <a:lstStyle/>
+            <a:p/>
+          </p:txBody>
+        </p:sp>
+        <p:sp>
+          <p:nvSpPr>
+            <p:cNvPr id="40" name="pt40"/>
+            <p:cNvSpPr/>
+            <p:nvPr/>
+          </p:nvSpPr>
+          <p:spPr>
+            <a:xfrm>
+              <a:off x="2815673" y="5254088"/>
+              <a:ext cx="74350" cy="74350"/>
+            </a:xfrm>
+            <a:prstGeom prst="ellipse">
+              <a:avLst/>
+            </a:prstGeom>
+            <a:solidFill>
+              <a:srgbClr val="F0C419">
+                <a:alpha val="100000"/>
+              </a:srgbClr>
+            </a:solidFill>
+            <a:ln w="14727" cap="rnd">
+              <a:solidFill>
+                <a:srgbClr val="F0C419">
+                  <a:alpha val="100000"/>
+                </a:srgbClr>
+              </a:solidFill>
+              <a:prstDash val="solid"/>
+              <a:round/>
+            </a:ln>
+          </p:spPr>
+          <p:txBody>
+            <a:bodyPr/>
+            <a:lstStyle/>
+            <a:p/>
+          </p:txBody>
+        </p:sp>
+        <p:sp>
+          <p:nvSpPr>
+            <p:cNvPr id="41" name="pt41"/>
+            <p:cNvSpPr/>
+            <p:nvPr/>
+          </p:nvSpPr>
+          <p:spPr>
+            <a:xfrm>
+              <a:off x="3240317" y="5367436"/>
+              <a:ext cx="74350" cy="74350"/>
+            </a:xfrm>
+            <a:prstGeom prst="ellipse">
+              <a:avLst/>
+            </a:prstGeom>
+            <a:solidFill>
+              <a:srgbClr val="F0C419">
+                <a:alpha val="100000"/>
+              </a:srgbClr>
+            </a:solidFill>
+            <a:ln w="14727" cap="rnd">
+              <a:solidFill>
+                <a:srgbClr val="F0C419">
+                  <a:alpha val="100000"/>
+                </a:srgbClr>
+              </a:solidFill>
+              <a:prstDash val="solid"/>
+              <a:round/>
+            </a:ln>
+          </p:spPr>
+          <p:txBody>
+            <a:bodyPr/>
+            <a:lstStyle/>
+            <a:p/>
+          </p:txBody>
+        </p:sp>
+        <p:sp>
+          <p:nvSpPr>
+            <p:cNvPr id="42" name="pt42"/>
+            <p:cNvSpPr/>
+            <p:nvPr/>
+          </p:nvSpPr>
+          <p:spPr>
+            <a:xfrm>
+              <a:off x="3664961" y="5386328"/>
+              <a:ext cx="74350" cy="74350"/>
+            </a:xfrm>
+            <a:prstGeom prst="ellipse">
+              <a:avLst/>
+            </a:prstGeom>
+            <a:solidFill>
+              <a:srgbClr val="F0C419">
+                <a:alpha val="100000"/>
+              </a:srgbClr>
+            </a:solidFill>
+            <a:ln w="14727" cap="rnd">
+              <a:solidFill>
+                <a:srgbClr val="F0C419">
+                  <a:alpha val="100000"/>
+                </a:srgbClr>
+              </a:solidFill>
+              <a:prstDash val="solid"/>
+              <a:round/>
+            </a:ln>
+          </p:spPr>
+          <p:txBody>
+            <a:bodyPr/>
+            <a:lstStyle/>
+            <a:p/>
+          </p:txBody>
+        </p:sp>
+        <p:sp>
+          <p:nvSpPr>
+            <p:cNvPr id="43" name="pt43"/>
+            <p:cNvSpPr/>
+            <p:nvPr/>
+          </p:nvSpPr>
+          <p:spPr>
+            <a:xfrm>
+              <a:off x="4089605" y="5386328"/>
+              <a:ext cx="74350" cy="74350"/>
+            </a:xfrm>
+            <a:prstGeom prst="ellipse">
+              <a:avLst/>
+            </a:prstGeom>
+            <a:solidFill>
+              <a:srgbClr val="F0C419">
+                <a:alpha val="100000"/>
+              </a:srgbClr>
+            </a:solidFill>
+            <a:ln w="14727" cap="rnd">
+              <a:solidFill>
+                <a:srgbClr val="F0C419">
+                  <a:alpha val="100000"/>
+                </a:srgbClr>
+              </a:solidFill>
+              <a:prstDash val="solid"/>
+              <a:round/>
+            </a:ln>
+          </p:spPr>
+          <p:txBody>
+            <a:bodyPr/>
+            <a:lstStyle/>
+            <a:p/>
+          </p:txBody>
+        </p:sp>
+        <p:sp>
+          <p:nvSpPr>
+            <p:cNvPr id="44" name="pt44"/>
+            <p:cNvSpPr/>
+            <p:nvPr/>
+          </p:nvSpPr>
+          <p:spPr>
+            <a:xfrm>
+              <a:off x="4514249" y="5386328"/>
+              <a:ext cx="74350" cy="74350"/>
+            </a:xfrm>
+            <a:prstGeom prst="ellipse">
+              <a:avLst/>
+            </a:prstGeom>
+            <a:solidFill>
+              <a:srgbClr val="F0C419">
+                <a:alpha val="100000"/>
+              </a:srgbClr>
+            </a:solidFill>
+            <a:ln w="14727" cap="rnd">
+              <a:solidFill>
+                <a:srgbClr val="F0C419">
+                  <a:alpha val="100000"/>
+                </a:srgbClr>
+              </a:solidFill>
+              <a:prstDash val="solid"/>
+              <a:round/>
+            </a:ln>
+          </p:spPr>
+          <p:txBody>
+            <a:bodyPr/>
+            <a:lstStyle/>
+            <a:p/>
+          </p:txBody>
+        </p:sp>
+        <p:sp>
+          <p:nvSpPr>
+            <p:cNvPr id="45" name="pt45"/>
+            <p:cNvSpPr/>
+            <p:nvPr/>
+          </p:nvSpPr>
+          <p:spPr>
+            <a:xfrm>
+              <a:off x="4938892" y="4895151"/>
+              <a:ext cx="74350" cy="74350"/>
+            </a:xfrm>
+            <a:prstGeom prst="ellipse">
+              <a:avLst/>
+            </a:prstGeom>
+            <a:solidFill>
+              <a:srgbClr val="F0C419">
+                <a:alpha val="100000"/>
+              </a:srgbClr>
+            </a:solidFill>
+            <a:ln w="14727" cap="rnd">
+              <a:solidFill>
+                <a:srgbClr val="F0C419">
+                  <a:alpha val="100000"/>
+                </a:srgbClr>
+              </a:solidFill>
+              <a:prstDash val="solid"/>
+              <a:round/>
+            </a:ln>
+          </p:spPr>
+          <p:txBody>
+            <a:bodyPr/>
+            <a:lstStyle/>
+            <a:p/>
+          </p:txBody>
+        </p:sp>
+        <p:sp>
+          <p:nvSpPr>
+            <p:cNvPr id="46" name="pt46"/>
+            <p:cNvSpPr/>
+            <p:nvPr/>
+          </p:nvSpPr>
+          <p:spPr>
+            <a:xfrm>
+              <a:off x="5363536" y="5329653"/>
+              <a:ext cx="74350" cy="74350"/>
+            </a:xfrm>
+            <a:prstGeom prst="ellipse">
+              <a:avLst/>
+            </a:prstGeom>
+            <a:solidFill>
+              <a:srgbClr val="F0C419">
+                <a:alpha val="100000"/>
+              </a:srgbClr>
+            </a:solidFill>
+            <a:ln w="14727" cap="rnd">
+              <a:solidFill>
+                <a:srgbClr val="F0C419">
+                  <a:alpha val="100000"/>
+                </a:srgbClr>
+              </a:solidFill>
+              <a:prstDash val="solid"/>
+              <a:round/>
+            </a:ln>
+          </p:spPr>
+          <p:txBody>
+            <a:bodyPr/>
+            <a:lstStyle/>
+            <a:p/>
+          </p:txBody>
+        </p:sp>
+        <p:sp>
+          <p:nvSpPr>
+            <p:cNvPr id="47" name="pt47"/>
+            <p:cNvSpPr/>
+            <p:nvPr/>
+          </p:nvSpPr>
+          <p:spPr>
+            <a:xfrm>
+              <a:off x="1541741" y="5380411"/>
+              <a:ext cx="74350" cy="74350"/>
+            </a:xfrm>
+            <a:prstGeom prst="ellipse">
+              <a:avLst/>
+            </a:prstGeom>
+            <a:solidFill>
+              <a:srgbClr val="E7298A">
+                <a:alpha val="100000"/>
+              </a:srgbClr>
+            </a:solidFill>
+            <a:ln w="14727" cap="rnd">
+              <a:solidFill>
+                <a:srgbClr val="E7298A">
+                  <a:alpha val="100000"/>
+                </a:srgbClr>
+              </a:solidFill>
+              <a:prstDash val="solid"/>
+              <a:round/>
+            </a:ln>
+          </p:spPr>
+          <p:txBody>
+            <a:bodyPr/>
+            <a:lstStyle/>
+            <a:p/>
+          </p:txBody>
+        </p:sp>
+        <p:sp>
+          <p:nvSpPr>
+            <p:cNvPr id="48" name="pt48"/>
+            <p:cNvSpPr/>
+            <p:nvPr/>
+          </p:nvSpPr>
+          <p:spPr>
+            <a:xfrm>
+              <a:off x="1966385" y="5374494"/>
+              <a:ext cx="74350" cy="74350"/>
+            </a:xfrm>
+            <a:prstGeom prst="ellipse">
+              <a:avLst/>
+            </a:prstGeom>
+            <a:solidFill>
+              <a:srgbClr val="E7298A">
+                <a:alpha val="100000"/>
+              </a:srgbClr>
+            </a:solidFill>
+            <a:ln w="14727" cap="rnd">
+              <a:solidFill>
+                <a:srgbClr val="E7298A">
+                  <a:alpha val="100000"/>
+                </a:srgbClr>
+              </a:solidFill>
+              <a:prstDash val="solid"/>
+              <a:round/>
+            </a:ln>
+          </p:spPr>
+          <p:txBody>
+            <a:bodyPr/>
+            <a:lstStyle/>
+            <a:p/>
+          </p:txBody>
+        </p:sp>
+        <p:sp>
+          <p:nvSpPr>
+            <p:cNvPr id="49" name="pt49"/>
+            <p:cNvSpPr/>
+            <p:nvPr/>
+          </p:nvSpPr>
+          <p:spPr>
+            <a:xfrm>
+              <a:off x="2391029" y="5386328"/>
+              <a:ext cx="74350" cy="74350"/>
+            </a:xfrm>
+            <a:prstGeom prst="ellipse">
+              <a:avLst/>
+            </a:prstGeom>
+            <a:solidFill>
+              <a:srgbClr val="E7298A">
+                <a:alpha val="100000"/>
+              </a:srgbClr>
+            </a:solidFill>
+            <a:ln w="14727" cap="rnd">
+              <a:solidFill>
+                <a:srgbClr val="E7298A">
+                  <a:alpha val="100000"/>
+                </a:srgbClr>
+              </a:solidFill>
+              <a:prstDash val="solid"/>
+              <a:round/>
+            </a:ln>
+          </p:spPr>
+          <p:txBody>
+            <a:bodyPr/>
+            <a:lstStyle/>
+            <a:p/>
+          </p:txBody>
+        </p:sp>
+        <p:sp>
+          <p:nvSpPr>
+            <p:cNvPr id="50" name="pt50"/>
+            <p:cNvSpPr/>
+            <p:nvPr/>
+          </p:nvSpPr>
+          <p:spPr>
+            <a:xfrm>
+              <a:off x="2815673" y="5386328"/>
+              <a:ext cx="74350" cy="74350"/>
+            </a:xfrm>
+            <a:prstGeom prst="ellipse">
+              <a:avLst/>
+            </a:prstGeom>
+            <a:solidFill>
+              <a:srgbClr val="E7298A">
+                <a:alpha val="100000"/>
+              </a:srgbClr>
+            </a:solidFill>
+            <a:ln w="14727" cap="rnd">
+              <a:solidFill>
+                <a:srgbClr val="E7298A">
+                  <a:alpha val="100000"/>
+                </a:srgbClr>
+              </a:solidFill>
+              <a:prstDash val="solid"/>
+              <a:round/>
+            </a:ln>
+          </p:spPr>
+          <p:txBody>
+            <a:bodyPr/>
+            <a:lstStyle/>
+            <a:p/>
+          </p:txBody>
+        </p:sp>
+        <p:sp>
+          <p:nvSpPr>
+            <p:cNvPr id="51" name="pt51"/>
+            <p:cNvSpPr/>
+            <p:nvPr/>
+          </p:nvSpPr>
+          <p:spPr>
+            <a:xfrm>
+              <a:off x="3240317" y="5386328"/>
+              <a:ext cx="74350" cy="74350"/>
+            </a:xfrm>
+            <a:prstGeom prst="ellipse">
+              <a:avLst/>
+            </a:prstGeom>
+            <a:solidFill>
+              <a:srgbClr val="E7298A">
+                <a:alpha val="100000"/>
+              </a:srgbClr>
+            </a:solidFill>
+            <a:ln w="14727" cap="rnd">
+              <a:solidFill>
+                <a:srgbClr val="E7298A">
+                  <a:alpha val="100000"/>
+                </a:srgbClr>
+              </a:solidFill>
+              <a:prstDash val="solid"/>
+              <a:round/>
+            </a:ln>
+          </p:spPr>
+          <p:txBody>
+            <a:bodyPr/>
+            <a:lstStyle/>
+            <a:p/>
+          </p:txBody>
+        </p:sp>
+        <p:sp>
+          <p:nvSpPr>
+            <p:cNvPr id="52" name="pt52"/>
+            <p:cNvSpPr/>
+            <p:nvPr/>
+          </p:nvSpPr>
+          <p:spPr>
+            <a:xfrm>
+              <a:off x="3664961" y="5368577"/>
+              <a:ext cx="74350" cy="74350"/>
+            </a:xfrm>
+            <a:prstGeom prst="ellipse">
+              <a:avLst/>
+            </a:prstGeom>
+            <a:solidFill>
+              <a:srgbClr val="E7298A">
+                <a:alpha val="100000"/>
+              </a:srgbClr>
+            </a:solidFill>
+            <a:ln w="14727" cap="rnd">
+              <a:solidFill>
+                <a:srgbClr val="E7298A">
+                  <a:alpha val="100000"/>
+                </a:srgbClr>
+              </a:solidFill>
+              <a:prstDash val="solid"/>
+              <a:round/>
+            </a:ln>
+          </p:spPr>
+          <p:txBody>
+            <a:bodyPr/>
+            <a:lstStyle/>
+            <a:p/>
+          </p:txBody>
+        </p:sp>
+        <p:sp>
+          <p:nvSpPr>
+            <p:cNvPr id="53" name="pt53"/>
+            <p:cNvSpPr/>
+            <p:nvPr/>
+          </p:nvSpPr>
+          <p:spPr>
+            <a:xfrm>
+              <a:off x="4089605" y="5380411"/>
+              <a:ext cx="74350" cy="74350"/>
+            </a:xfrm>
+            <a:prstGeom prst="ellipse">
+              <a:avLst/>
+            </a:prstGeom>
+            <a:solidFill>
+              <a:srgbClr val="E7298A">
+                <a:alpha val="100000"/>
+              </a:srgbClr>
+            </a:solidFill>
+            <a:ln w="14727" cap="rnd">
+              <a:solidFill>
+                <a:srgbClr val="E7298A">
+                  <a:alpha val="100000"/>
+                </a:srgbClr>
+              </a:solidFill>
+              <a:prstDash val="solid"/>
+              <a:round/>
+            </a:ln>
+          </p:spPr>
+          <p:txBody>
+            <a:bodyPr/>
+            <a:lstStyle/>
+            <a:p/>
+          </p:txBody>
+        </p:sp>
+        <p:sp>
+          <p:nvSpPr>
+            <p:cNvPr id="54" name="pt54"/>
+            <p:cNvSpPr/>
+            <p:nvPr/>
+          </p:nvSpPr>
+          <p:spPr>
+            <a:xfrm>
+              <a:off x="4514249" y="3954473"/>
+              <a:ext cx="74350" cy="74350"/>
+            </a:xfrm>
+            <a:prstGeom prst="ellipse">
+              <a:avLst/>
+            </a:prstGeom>
+            <a:solidFill>
+              <a:srgbClr val="E7298A">
+                <a:alpha val="100000"/>
+              </a:srgbClr>
+            </a:solidFill>
+            <a:ln w="14727" cap="rnd">
+              <a:solidFill>
+                <a:srgbClr val="E7298A">
+                  <a:alpha val="100000"/>
+                </a:srgbClr>
+              </a:solidFill>
+              <a:prstDash val="solid"/>
+              <a:round/>
+            </a:ln>
+          </p:spPr>
+          <p:txBody>
+            <a:bodyPr/>
+            <a:lstStyle/>
+            <a:p/>
+          </p:txBody>
+        </p:sp>
+        <p:sp>
+          <p:nvSpPr>
+            <p:cNvPr id="55" name="pt55"/>
+            <p:cNvSpPr/>
+            <p:nvPr/>
+          </p:nvSpPr>
+          <p:spPr>
+            <a:xfrm>
+              <a:off x="4938892" y="4108309"/>
+              <a:ext cx="74350" cy="74350"/>
+            </a:xfrm>
+            <a:prstGeom prst="ellipse">
+              <a:avLst/>
+            </a:prstGeom>
+            <a:solidFill>
+              <a:srgbClr val="E7298A">
+                <a:alpha val="100000"/>
+              </a:srgbClr>
+            </a:solidFill>
+            <a:ln w="14727" cap="rnd">
+              <a:solidFill>
+                <a:srgbClr val="E7298A">
+                  <a:alpha val="100000"/>
+                </a:srgbClr>
+              </a:solidFill>
+              <a:prstDash val="solid"/>
+              <a:round/>
+            </a:ln>
+          </p:spPr>
+          <p:txBody>
+            <a:bodyPr/>
+            <a:lstStyle/>
+            <a:p/>
+          </p:txBody>
+        </p:sp>
+        <p:sp>
+          <p:nvSpPr>
+            <p:cNvPr id="56" name="pt56"/>
+            <p:cNvSpPr/>
+            <p:nvPr/>
+          </p:nvSpPr>
+          <p:spPr>
+            <a:xfrm>
+              <a:off x="5363536" y="3410132"/>
+              <a:ext cx="74350" cy="74350"/>
+            </a:xfrm>
+            <a:prstGeom prst="ellipse">
+              <a:avLst/>
+            </a:prstGeom>
+            <a:solidFill>
+              <a:srgbClr val="E7298A">
+                <a:alpha val="100000"/>
+              </a:srgbClr>
+            </a:solidFill>
+            <a:ln w="14727" cap="rnd">
+              <a:solidFill>
+                <a:srgbClr val="E7298A">
+                  <a:alpha val="100000"/>
+                </a:srgbClr>
+              </a:solidFill>
+              <a:prstDash val="solid"/>
+              <a:round/>
+            </a:ln>
+          </p:spPr>
+          <p:txBody>
+            <a:bodyPr/>
+            <a:lstStyle/>
+            <a:p/>
+          </p:txBody>
+        </p:sp>
+        <p:sp>
+          <p:nvSpPr>
+            <p:cNvPr id="57" name="pt57"/>
+            <p:cNvSpPr/>
+            <p:nvPr/>
+          </p:nvSpPr>
+          <p:spPr>
+            <a:xfrm>
+              <a:off x="1541741" y="5302364"/>
               <a:ext cx="74350" cy="74350"/>
             </a:xfrm>
             <a:prstGeom prst="ellipse">
@@ -3620,13 +4448,13 @@
         </p:sp>
         <p:sp>
           <p:nvSpPr>
-            <p:cNvPr id="36" name="pt36"/>
-            <p:cNvSpPr/>
-            <p:nvPr/>
-          </p:nvSpPr>
-          <p:spPr>
-            <a:xfrm>
-              <a:off x="2109942" y="5121087"/>
+            <p:cNvPr id="58" name="pt58"/>
+            <p:cNvSpPr/>
+            <p:nvPr/>
+          </p:nvSpPr>
+          <p:spPr>
+            <a:xfrm>
+              <a:off x="1966385" y="5121087"/>
               <a:ext cx="74350" cy="74350"/>
             </a:xfrm>
             <a:prstGeom prst="ellipse">
@@ -3655,13 +4483,13 @@
         </p:sp>
         <p:sp>
           <p:nvSpPr>
-            <p:cNvPr id="37" name="pt37"/>
-            <p:cNvSpPr/>
-            <p:nvPr/>
-          </p:nvSpPr>
-          <p:spPr>
-            <a:xfrm>
-              <a:off x="2633590" y="5155867"/>
+            <p:cNvPr id="59" name="pt59"/>
+            <p:cNvSpPr/>
+            <p:nvPr/>
+          </p:nvSpPr>
+          <p:spPr>
+            <a:xfrm>
+              <a:off x="2391029" y="5155867"/>
               <a:ext cx="74350" cy="74350"/>
             </a:xfrm>
             <a:prstGeom prst="ellipse">
@@ -3690,13 +4518,13 @@
         </p:sp>
         <p:sp>
           <p:nvSpPr>
-            <p:cNvPr id="38" name="pt38"/>
-            <p:cNvSpPr/>
-            <p:nvPr/>
-          </p:nvSpPr>
-          <p:spPr>
-            <a:xfrm>
-              <a:off x="3157239" y="4881493"/>
+            <p:cNvPr id="60" name="pt60"/>
+            <p:cNvSpPr/>
+            <p:nvPr/>
+          </p:nvSpPr>
+          <p:spPr>
+            <a:xfrm>
+              <a:off x="2815673" y="4881493"/>
               <a:ext cx="74350" cy="74350"/>
             </a:xfrm>
             <a:prstGeom prst="ellipse">
@@ -3725,13 +4553,13 @@
         </p:sp>
         <p:sp>
           <p:nvSpPr>
-            <p:cNvPr id="39" name="pt39"/>
-            <p:cNvSpPr/>
-            <p:nvPr/>
-          </p:nvSpPr>
-          <p:spPr>
-            <a:xfrm>
-              <a:off x="3680887" y="5240885"/>
+            <p:cNvPr id="61" name="pt61"/>
+            <p:cNvSpPr/>
+            <p:nvPr/>
+          </p:nvSpPr>
+          <p:spPr>
+            <a:xfrm>
+              <a:off x="3240317" y="5240885"/>
               <a:ext cx="74350" cy="74350"/>
             </a:xfrm>
             <a:prstGeom prst="ellipse">
@@ -3760,13 +4588,13 @@
         </p:sp>
         <p:sp>
           <p:nvSpPr>
-            <p:cNvPr id="40" name="pt40"/>
-            <p:cNvSpPr/>
-            <p:nvPr/>
-          </p:nvSpPr>
-          <p:spPr>
-            <a:xfrm>
-              <a:off x="4204536" y="5126006"/>
+            <p:cNvPr id="62" name="pt62"/>
+            <p:cNvSpPr/>
+            <p:nvPr/>
+          </p:nvSpPr>
+          <p:spPr>
+            <a:xfrm>
+              <a:off x="3664961" y="5126006"/>
               <a:ext cx="74350" cy="74350"/>
             </a:xfrm>
             <a:prstGeom prst="ellipse">
@@ -3795,13 +4623,13 @@
         </p:sp>
         <p:sp>
           <p:nvSpPr>
-            <p:cNvPr id="41" name="pt41"/>
-            <p:cNvSpPr/>
-            <p:nvPr/>
-          </p:nvSpPr>
-          <p:spPr>
-            <a:xfrm>
-              <a:off x="4728184" y="5150246"/>
+            <p:cNvPr id="63" name="pt63"/>
+            <p:cNvSpPr/>
+            <p:nvPr/>
+          </p:nvSpPr>
+          <p:spPr>
+            <a:xfrm>
+              <a:off x="4089605" y="5150246"/>
               <a:ext cx="74350" cy="74350"/>
             </a:xfrm>
             <a:prstGeom prst="ellipse">
@@ -3830,13 +4658,13 @@
         </p:sp>
         <p:sp>
           <p:nvSpPr>
-            <p:cNvPr id="42" name="pt42"/>
-            <p:cNvSpPr/>
-            <p:nvPr/>
-          </p:nvSpPr>
-          <p:spPr>
-            <a:xfrm>
-              <a:off x="5251833" y="4922596"/>
+            <p:cNvPr id="64" name="pt64"/>
+            <p:cNvSpPr/>
+            <p:nvPr/>
+          </p:nvSpPr>
+          <p:spPr>
+            <a:xfrm>
+              <a:off x="4514249" y="4922596"/>
               <a:ext cx="74350" cy="74350"/>
             </a:xfrm>
             <a:prstGeom prst="ellipse">
@@ -3865,13 +4693,13 @@
         </p:sp>
         <p:sp>
           <p:nvSpPr>
-            <p:cNvPr id="43" name="pt43"/>
-            <p:cNvSpPr/>
-            <p:nvPr/>
-          </p:nvSpPr>
-          <p:spPr>
-            <a:xfrm>
-              <a:off x="5775481" y="5278826"/>
+            <p:cNvPr id="65" name="pt65"/>
+            <p:cNvSpPr/>
+            <p:nvPr/>
+          </p:nvSpPr>
+          <p:spPr>
+            <a:xfrm>
+              <a:off x="4938892" y="5278826"/>
               <a:ext cx="74350" cy="74350"/>
             </a:xfrm>
             <a:prstGeom prst="ellipse">
@@ -3900,13 +4728,13 @@
         </p:sp>
         <p:sp>
           <p:nvSpPr>
-            <p:cNvPr id="44" name="pt44"/>
-            <p:cNvSpPr/>
-            <p:nvPr/>
-          </p:nvSpPr>
-          <p:spPr>
-            <a:xfrm>
-              <a:off x="6299130" y="5344873"/>
+            <p:cNvPr id="66" name="pt66"/>
+            <p:cNvSpPr/>
+            <p:nvPr/>
+          </p:nvSpPr>
+          <p:spPr>
+            <a:xfrm>
+              <a:off x="5363536" y="5344873"/>
               <a:ext cx="74350" cy="74350"/>
             </a:xfrm>
             <a:prstGeom prst="ellipse">
@@ -3935,13 +4763,13 @@
         </p:sp>
         <p:sp>
           <p:nvSpPr>
-            <p:cNvPr id="45" name="pt45"/>
-            <p:cNvSpPr/>
-            <p:nvPr/>
-          </p:nvSpPr>
-          <p:spPr>
-            <a:xfrm>
-              <a:off x="1586293" y="5285020"/>
+            <p:cNvPr id="67" name="pt67"/>
+            <p:cNvSpPr/>
+            <p:nvPr/>
+          </p:nvSpPr>
+          <p:spPr>
+            <a:xfrm>
+              <a:off x="1541741" y="5285020"/>
               <a:ext cx="74350" cy="74350"/>
             </a:xfrm>
             <a:prstGeom prst="ellipse">
@@ -3970,13 +4798,13 @@
         </p:sp>
         <p:sp>
           <p:nvSpPr>
-            <p:cNvPr id="46" name="pt46"/>
-            <p:cNvSpPr/>
-            <p:nvPr/>
-          </p:nvSpPr>
-          <p:spPr>
-            <a:xfrm>
-              <a:off x="2109942" y="5013555"/>
+            <p:cNvPr id="68" name="pt68"/>
+            <p:cNvSpPr/>
+            <p:nvPr/>
+          </p:nvSpPr>
+          <p:spPr>
+            <a:xfrm>
+              <a:off x="1966385" y="5013555"/>
               <a:ext cx="74350" cy="74350"/>
             </a:xfrm>
             <a:prstGeom prst="ellipse">
@@ -4005,13 +4833,13 @@
         </p:sp>
         <p:sp>
           <p:nvSpPr>
-            <p:cNvPr id="47" name="pt47"/>
-            <p:cNvSpPr/>
-            <p:nvPr/>
-          </p:nvSpPr>
-          <p:spPr>
-            <a:xfrm>
-              <a:off x="2633590" y="4376204"/>
+            <p:cNvPr id="69" name="pt69"/>
+            <p:cNvSpPr/>
+            <p:nvPr/>
+          </p:nvSpPr>
+          <p:spPr>
+            <a:xfrm>
+              <a:off x="2391029" y="4376204"/>
               <a:ext cx="74350" cy="74350"/>
             </a:xfrm>
             <a:prstGeom prst="ellipse">
@@ -4040,13 +4868,13 @@
         </p:sp>
         <p:sp>
           <p:nvSpPr>
-            <p:cNvPr id="48" name="pt48"/>
-            <p:cNvSpPr/>
-            <p:nvPr/>
-          </p:nvSpPr>
-          <p:spPr>
-            <a:xfrm>
-              <a:off x="3157239" y="4246373"/>
+            <p:cNvPr id="70" name="pt70"/>
+            <p:cNvSpPr/>
+            <p:nvPr/>
+          </p:nvSpPr>
+          <p:spPr>
+            <a:xfrm>
+              <a:off x="2815673" y="4246373"/>
               <a:ext cx="74350" cy="74350"/>
             </a:xfrm>
             <a:prstGeom prst="ellipse">
@@ -4075,13 +4903,13 @@
         </p:sp>
         <p:sp>
           <p:nvSpPr>
-            <p:cNvPr id="49" name="pt49"/>
-            <p:cNvSpPr/>
-            <p:nvPr/>
-          </p:nvSpPr>
-          <p:spPr>
-            <a:xfrm>
-              <a:off x="3680887" y="3527385"/>
+            <p:cNvPr id="71" name="pt71"/>
+            <p:cNvSpPr/>
+            <p:nvPr/>
+          </p:nvSpPr>
+          <p:spPr>
+            <a:xfrm>
+              <a:off x="3240317" y="3527385"/>
               <a:ext cx="74350" cy="74350"/>
             </a:xfrm>
             <a:prstGeom prst="ellipse">
@@ -4110,13 +4938,13 @@
         </p:sp>
         <p:sp>
           <p:nvSpPr>
-            <p:cNvPr id="50" name="pt50"/>
-            <p:cNvSpPr/>
-            <p:nvPr/>
-          </p:nvSpPr>
-          <p:spPr>
-            <a:xfrm>
-              <a:off x="4204536" y="2144489"/>
+            <p:cNvPr id="72" name="pt72"/>
+            <p:cNvSpPr/>
+            <p:nvPr/>
+          </p:nvSpPr>
+          <p:spPr>
+            <a:xfrm>
+              <a:off x="3664961" y="2144489"/>
               <a:ext cx="74350" cy="74350"/>
             </a:xfrm>
             <a:prstGeom prst="ellipse">
@@ -4145,13 +4973,13 @@
         </p:sp>
         <p:sp>
           <p:nvSpPr>
-            <p:cNvPr id="51" name="pt51"/>
-            <p:cNvSpPr/>
-            <p:nvPr/>
-          </p:nvSpPr>
-          <p:spPr>
-            <a:xfrm>
-              <a:off x="4728184" y="2569390"/>
+            <p:cNvPr id="73" name="pt73"/>
+            <p:cNvSpPr/>
+            <p:nvPr/>
+          </p:nvSpPr>
+          <p:spPr>
+            <a:xfrm>
+              <a:off x="4089605" y="2569390"/>
               <a:ext cx="74350" cy="74350"/>
             </a:xfrm>
             <a:prstGeom prst="ellipse">
@@ -4180,13 +5008,13 @@
         </p:sp>
         <p:sp>
           <p:nvSpPr>
-            <p:cNvPr id="52" name="pt52"/>
-            <p:cNvSpPr/>
-            <p:nvPr/>
-          </p:nvSpPr>
-          <p:spPr>
-            <a:xfrm>
-              <a:off x="5251833" y="4698814"/>
+            <p:cNvPr id="74" name="pt74"/>
+            <p:cNvSpPr/>
+            <p:nvPr/>
+          </p:nvSpPr>
+          <p:spPr>
+            <a:xfrm>
+              <a:off x="4514249" y="4698814"/>
               <a:ext cx="74350" cy="74350"/>
             </a:xfrm>
             <a:prstGeom prst="ellipse">
@@ -4215,13 +5043,13 @@
         </p:sp>
         <p:sp>
           <p:nvSpPr>
-            <p:cNvPr id="53" name="pt53"/>
-            <p:cNvSpPr/>
-            <p:nvPr/>
-          </p:nvSpPr>
-          <p:spPr>
-            <a:xfrm>
-              <a:off x="5775481" y="5384360"/>
+            <p:cNvPr id="75" name="pt75"/>
+            <p:cNvSpPr/>
+            <p:nvPr/>
+          </p:nvSpPr>
+          <p:spPr>
+            <a:xfrm>
+              <a:off x="4938892" y="5384360"/>
               <a:ext cx="74350" cy="74350"/>
             </a:xfrm>
             <a:prstGeom prst="ellipse">
@@ -4250,13 +5078,13 @@
         </p:sp>
         <p:sp>
           <p:nvSpPr>
-            <p:cNvPr id="54" name="pt54"/>
-            <p:cNvSpPr/>
-            <p:nvPr/>
-          </p:nvSpPr>
-          <p:spPr>
-            <a:xfrm>
-              <a:off x="6299130" y="5386328"/>
+            <p:cNvPr id="76" name="pt76"/>
+            <p:cNvSpPr/>
+            <p:nvPr/>
+          </p:nvSpPr>
+          <p:spPr>
+            <a:xfrm>
+              <a:off x="5363536" y="5386328"/>
               <a:ext cx="74350" cy="74350"/>
             </a:xfrm>
             <a:prstGeom prst="ellipse">
@@ -4285,13 +5113,13 @@
         </p:sp>
         <p:sp>
           <p:nvSpPr>
-            <p:cNvPr id="55" name="pt55"/>
-            <p:cNvSpPr/>
-            <p:nvPr/>
-          </p:nvSpPr>
-          <p:spPr>
-            <a:xfrm>
-              <a:off x="1586293" y="4590649"/>
+            <p:cNvPr id="77" name="pt77"/>
+            <p:cNvSpPr/>
+            <p:nvPr/>
+          </p:nvSpPr>
+          <p:spPr>
+            <a:xfrm>
+              <a:off x="1541741" y="4590649"/>
               <a:ext cx="74350" cy="74350"/>
             </a:xfrm>
             <a:prstGeom prst="ellipse">
@@ -4320,13 +5148,13 @@
         </p:sp>
         <p:sp>
           <p:nvSpPr>
-            <p:cNvPr id="56" name="pt56"/>
-            <p:cNvSpPr/>
-            <p:nvPr/>
-          </p:nvSpPr>
-          <p:spPr>
-            <a:xfrm>
-              <a:off x="2109942" y="4735656"/>
+            <p:cNvPr id="78" name="pt78"/>
+            <p:cNvSpPr/>
+            <p:nvPr/>
+          </p:nvSpPr>
+          <p:spPr>
+            <a:xfrm>
+              <a:off x="1966385" y="4735656"/>
               <a:ext cx="74350" cy="74350"/>
             </a:xfrm>
             <a:prstGeom prst="ellipse">
@@ -4355,13 +5183,13 @@
         </p:sp>
         <p:sp>
           <p:nvSpPr>
-            <p:cNvPr id="57" name="pt57"/>
-            <p:cNvSpPr/>
-            <p:nvPr/>
-          </p:nvSpPr>
-          <p:spPr>
-            <a:xfrm>
-              <a:off x="2633590" y="4395447"/>
+            <p:cNvPr id="79" name="pt79"/>
+            <p:cNvSpPr/>
+            <p:nvPr/>
+          </p:nvSpPr>
+          <p:spPr>
+            <a:xfrm>
+              <a:off x="2391029" y="4395447"/>
               <a:ext cx="74350" cy="74350"/>
             </a:xfrm>
             <a:prstGeom prst="ellipse">
@@ -4390,13 +5218,13 @@
         </p:sp>
         <p:sp>
           <p:nvSpPr>
-            <p:cNvPr id="58" name="pt58"/>
-            <p:cNvSpPr/>
-            <p:nvPr/>
-          </p:nvSpPr>
-          <p:spPr>
-            <a:xfrm>
-              <a:off x="3157239" y="2331888"/>
+            <p:cNvPr id="80" name="pt80"/>
+            <p:cNvSpPr/>
+            <p:nvPr/>
+          </p:nvSpPr>
+          <p:spPr>
+            <a:xfrm>
+              <a:off x="2815673" y="2331888"/>
               <a:ext cx="74350" cy="74350"/>
             </a:xfrm>
             <a:prstGeom prst="ellipse">
@@ -4425,13 +5253,13 @@
         </p:sp>
         <p:sp>
           <p:nvSpPr>
-            <p:cNvPr id="59" name="pt59"/>
-            <p:cNvSpPr/>
-            <p:nvPr/>
-          </p:nvSpPr>
-          <p:spPr>
-            <a:xfrm>
-              <a:off x="3680887" y="4889958"/>
+            <p:cNvPr id="81" name="pt81"/>
+            <p:cNvSpPr/>
+            <p:nvPr/>
+          </p:nvSpPr>
+          <p:spPr>
+            <a:xfrm>
+              <a:off x="3240317" y="4889958"/>
               <a:ext cx="74350" cy="74350"/>
             </a:xfrm>
             <a:prstGeom prst="ellipse">
@@ -4460,13 +5288,13 @@
         </p:sp>
         <p:sp>
           <p:nvSpPr>
-            <p:cNvPr id="60" name="pt60"/>
-            <p:cNvSpPr/>
-            <p:nvPr/>
-          </p:nvSpPr>
-          <p:spPr>
-            <a:xfrm>
-              <a:off x="4204536" y="5319401"/>
+            <p:cNvPr id="82" name="pt82"/>
+            <p:cNvSpPr/>
+            <p:nvPr/>
+          </p:nvSpPr>
+          <p:spPr>
+            <a:xfrm>
+              <a:off x="3664961" y="5319401"/>
               <a:ext cx="74350" cy="74350"/>
             </a:xfrm>
             <a:prstGeom prst="ellipse">
@@ -4495,13 +5323,13 @@
         </p:sp>
         <p:sp>
           <p:nvSpPr>
-            <p:cNvPr id="61" name="pt61"/>
-            <p:cNvSpPr/>
-            <p:nvPr/>
-          </p:nvSpPr>
-          <p:spPr>
-            <a:xfrm>
-              <a:off x="4728184" y="4350830"/>
+            <p:cNvPr id="83" name="pt83"/>
+            <p:cNvSpPr/>
+            <p:nvPr/>
+          </p:nvSpPr>
+          <p:spPr>
+            <a:xfrm>
+              <a:off x="4089605" y="4350830"/>
               <a:ext cx="74350" cy="74350"/>
             </a:xfrm>
             <a:prstGeom prst="ellipse">
@@ -4530,13 +5358,13 @@
         </p:sp>
         <p:sp>
           <p:nvSpPr>
-            <p:cNvPr id="62" name="pt62"/>
-            <p:cNvSpPr/>
-            <p:nvPr/>
-          </p:nvSpPr>
-          <p:spPr>
-            <a:xfrm>
-              <a:off x="5251833" y="2642351"/>
+            <p:cNvPr id="84" name="pt84"/>
+            <p:cNvSpPr/>
+            <p:nvPr/>
+          </p:nvSpPr>
+          <p:spPr>
+            <a:xfrm>
+              <a:off x="4514249" y="2642351"/>
               <a:ext cx="74350" cy="74350"/>
             </a:xfrm>
             <a:prstGeom prst="ellipse">
@@ -4565,13 +5393,13 @@
         </p:sp>
         <p:sp>
           <p:nvSpPr>
-            <p:cNvPr id="63" name="pt63"/>
-            <p:cNvSpPr/>
-            <p:nvPr/>
-          </p:nvSpPr>
-          <p:spPr>
-            <a:xfrm>
-              <a:off x="5775481" y="4285763"/>
+            <p:cNvPr id="85" name="pt85"/>
+            <p:cNvSpPr/>
+            <p:nvPr/>
+          </p:nvSpPr>
+          <p:spPr>
+            <a:xfrm>
+              <a:off x="4938892" y="4285763"/>
               <a:ext cx="74350" cy="74350"/>
             </a:xfrm>
             <a:prstGeom prst="ellipse">
@@ -4600,13 +5428,13 @@
         </p:sp>
         <p:sp>
           <p:nvSpPr>
-            <p:cNvPr id="64" name="pt64"/>
-            <p:cNvSpPr/>
-            <p:nvPr/>
-          </p:nvSpPr>
-          <p:spPr>
-            <a:xfrm>
-              <a:off x="6299130" y="1822505"/>
+            <p:cNvPr id="86" name="pt86"/>
+            <p:cNvSpPr/>
+            <p:nvPr/>
+          </p:nvSpPr>
+          <p:spPr>
+            <a:xfrm>
+              <a:off x="5363536" y="1822505"/>
               <a:ext cx="74350" cy="74350"/>
             </a:xfrm>
             <a:prstGeom prst="ellipse">
@@ -4635,7 +5463,7 @@
         </p:sp>
         <p:sp>
           <p:nvSpPr>
-            <p:cNvPr id="65" name="tx65"/>
+            <p:cNvPr id="87" name="tx87"/>
             <p:cNvSpPr/>
             <p:nvPr/>
           </p:nvSpPr>
@@ -4678,7 +5506,7 @@
         </p:sp>
         <p:sp>
           <p:nvSpPr>
-            <p:cNvPr id="66" name="tx66"/>
+            <p:cNvPr id="88" name="tx88"/>
             <p:cNvSpPr/>
             <p:nvPr/>
           </p:nvSpPr>
@@ -4721,7 +5549,7 @@
         </p:sp>
         <p:sp>
           <p:nvSpPr>
-            <p:cNvPr id="67" name="tx67"/>
+            <p:cNvPr id="89" name="tx89"/>
             <p:cNvSpPr/>
             <p:nvPr/>
           </p:nvSpPr>
@@ -4764,7 +5592,7 @@
         </p:sp>
         <p:sp>
           <p:nvSpPr>
-            <p:cNvPr id="68" name="tx68"/>
+            <p:cNvPr id="90" name="tx90"/>
             <p:cNvSpPr/>
             <p:nvPr/>
           </p:nvSpPr>
@@ -4807,7 +5635,7 @@
         </p:sp>
         <p:sp>
           <p:nvSpPr>
-            <p:cNvPr id="69" name="tx69"/>
+            <p:cNvPr id="91" name="tx91"/>
             <p:cNvSpPr/>
             <p:nvPr/>
           </p:nvSpPr>
@@ -4850,7 +5678,7 @@
         </p:sp>
         <p:sp>
           <p:nvSpPr>
-            <p:cNvPr id="70" name="tx70"/>
+            <p:cNvPr id="92" name="tx92"/>
             <p:cNvSpPr/>
             <p:nvPr/>
           </p:nvSpPr>
@@ -4893,13 +5721,13 @@
         </p:sp>
         <p:sp>
           <p:nvSpPr>
-            <p:cNvPr id="71" name="tx71"/>
-            <p:cNvSpPr/>
-            <p:nvPr/>
-          </p:nvSpPr>
-          <p:spPr>
-            <a:xfrm>
-              <a:off x="1390845" y="5704179"/>
+            <p:cNvPr id="93" name="tx93"/>
+            <p:cNvSpPr/>
+            <p:nvPr/>
+          </p:nvSpPr>
+          <p:spPr>
+            <a:xfrm>
+              <a:off x="1346293" y="5704179"/>
               <a:ext cx="465246" cy="133228"/>
             </a:xfrm>
             <a:prstGeom prst="rect">
@@ -4936,13 +5764,13 @@
         </p:sp>
         <p:sp>
           <p:nvSpPr>
-            <p:cNvPr id="72" name="tx72"/>
-            <p:cNvSpPr/>
-            <p:nvPr/>
-          </p:nvSpPr>
-          <p:spPr>
-            <a:xfrm>
-              <a:off x="1914493" y="5704179"/>
+            <p:cNvPr id="94" name="tx94"/>
+            <p:cNvSpPr/>
+            <p:nvPr/>
+          </p:nvSpPr>
+          <p:spPr>
+            <a:xfrm>
+              <a:off x="1770937" y="5704179"/>
               <a:ext cx="465246" cy="133228"/>
             </a:xfrm>
             <a:prstGeom prst="rect">
@@ -4979,13 +5807,13 @@
         </p:sp>
         <p:sp>
           <p:nvSpPr>
-            <p:cNvPr id="73" name="tx73"/>
-            <p:cNvSpPr/>
-            <p:nvPr/>
-          </p:nvSpPr>
-          <p:spPr>
-            <a:xfrm>
-              <a:off x="2438142" y="5704179"/>
+            <p:cNvPr id="95" name="tx95"/>
+            <p:cNvSpPr/>
+            <p:nvPr/>
+          </p:nvSpPr>
+          <p:spPr>
+            <a:xfrm>
+              <a:off x="2195581" y="5704179"/>
               <a:ext cx="465246" cy="133228"/>
             </a:xfrm>
             <a:prstGeom prst="rect">
@@ -5022,13 +5850,13 @@
         </p:sp>
         <p:sp>
           <p:nvSpPr>
-            <p:cNvPr id="74" name="tx74"/>
-            <p:cNvSpPr/>
-            <p:nvPr/>
-          </p:nvSpPr>
-          <p:spPr>
-            <a:xfrm>
-              <a:off x="2961790" y="5704179"/>
+            <p:cNvPr id="96" name="tx96"/>
+            <p:cNvSpPr/>
+            <p:nvPr/>
+          </p:nvSpPr>
+          <p:spPr>
+            <a:xfrm>
+              <a:off x="2620224" y="5704179"/>
               <a:ext cx="465246" cy="133228"/>
             </a:xfrm>
             <a:prstGeom prst="rect">
@@ -5065,13 +5893,13 @@
         </p:sp>
         <p:sp>
           <p:nvSpPr>
-            <p:cNvPr id="75" name="tx75"/>
-            <p:cNvSpPr/>
-            <p:nvPr/>
-          </p:nvSpPr>
-          <p:spPr>
-            <a:xfrm>
-              <a:off x="3485439" y="5704179"/>
+            <p:cNvPr id="97" name="tx97"/>
+            <p:cNvSpPr/>
+            <p:nvPr/>
+          </p:nvSpPr>
+          <p:spPr>
+            <a:xfrm>
+              <a:off x="3044868" y="5704179"/>
               <a:ext cx="465246" cy="133228"/>
             </a:xfrm>
             <a:prstGeom prst="rect">
@@ -5108,13 +5936,13 @@
         </p:sp>
         <p:sp>
           <p:nvSpPr>
-            <p:cNvPr id="76" name="tx76"/>
-            <p:cNvSpPr/>
-            <p:nvPr/>
-          </p:nvSpPr>
-          <p:spPr>
-            <a:xfrm>
-              <a:off x="4009087" y="5704179"/>
+            <p:cNvPr id="98" name="tx98"/>
+            <p:cNvSpPr/>
+            <p:nvPr/>
+          </p:nvSpPr>
+          <p:spPr>
+            <a:xfrm>
+              <a:off x="3469512" y="5704179"/>
               <a:ext cx="465246" cy="133228"/>
             </a:xfrm>
             <a:prstGeom prst="rect">
@@ -5151,13 +5979,13 @@
         </p:sp>
         <p:sp>
           <p:nvSpPr>
-            <p:cNvPr id="77" name="tx77"/>
-            <p:cNvSpPr/>
-            <p:nvPr/>
-          </p:nvSpPr>
-          <p:spPr>
-            <a:xfrm>
-              <a:off x="4532736" y="5704179"/>
+            <p:cNvPr id="99" name="tx99"/>
+            <p:cNvSpPr/>
+            <p:nvPr/>
+          </p:nvSpPr>
+          <p:spPr>
+            <a:xfrm>
+              <a:off x="3894156" y="5704179"/>
               <a:ext cx="465246" cy="133228"/>
             </a:xfrm>
             <a:prstGeom prst="rect">
@@ -5194,13 +6022,13 @@
         </p:sp>
         <p:sp>
           <p:nvSpPr>
-            <p:cNvPr id="78" name="tx78"/>
-            <p:cNvSpPr/>
-            <p:nvPr/>
-          </p:nvSpPr>
-          <p:spPr>
-            <a:xfrm>
-              <a:off x="5056384" y="5704179"/>
+            <p:cNvPr id="100" name="tx100"/>
+            <p:cNvSpPr/>
+            <p:nvPr/>
+          </p:nvSpPr>
+          <p:spPr>
+            <a:xfrm>
+              <a:off x="4318800" y="5704179"/>
               <a:ext cx="465246" cy="133228"/>
             </a:xfrm>
             <a:prstGeom prst="rect">
@@ -5237,13 +6065,13 @@
         </p:sp>
         <p:sp>
           <p:nvSpPr>
-            <p:cNvPr id="79" name="tx79"/>
-            <p:cNvSpPr/>
-            <p:nvPr/>
-          </p:nvSpPr>
-          <p:spPr>
-            <a:xfrm>
-              <a:off x="5580033" y="5704179"/>
+            <p:cNvPr id="101" name="tx101"/>
+            <p:cNvSpPr/>
+            <p:nvPr/>
+          </p:nvSpPr>
+          <p:spPr>
+            <a:xfrm>
+              <a:off x="4743444" y="5704179"/>
               <a:ext cx="465246" cy="133228"/>
             </a:xfrm>
             <a:prstGeom prst="rect">
@@ -5280,13 +6108,13 @@
         </p:sp>
         <p:sp>
           <p:nvSpPr>
-            <p:cNvPr id="80" name="tx80"/>
-            <p:cNvSpPr/>
-            <p:nvPr/>
-          </p:nvSpPr>
-          <p:spPr>
-            <a:xfrm>
-              <a:off x="6103681" y="5704179"/>
+            <p:cNvPr id="102" name="tx102"/>
+            <p:cNvSpPr/>
+            <p:nvPr/>
+          </p:nvSpPr>
+          <p:spPr>
+            <a:xfrm>
+              <a:off x="5168088" y="5704179"/>
               <a:ext cx="465246" cy="133228"/>
             </a:xfrm>
             <a:prstGeom prst="rect">
@@ -5323,7 +6151,7 @@
         </p:sp>
         <p:sp>
           <p:nvSpPr>
-            <p:cNvPr id="81" name="tx81"/>
+            <p:cNvPr id="103" name="tx103"/>
             <p:cNvSpPr/>
             <p:nvPr/>
           </p:nvSpPr>
@@ -5366,13 +6194,13 @@
         </p:sp>
         <p:sp>
           <p:nvSpPr>
-            <p:cNvPr id="82" name="pl82"/>
-            <p:cNvSpPr/>
-            <p:nvPr/>
-          </p:nvSpPr>
-          <p:spPr>
-            <a:xfrm>
-              <a:off x="6935511" y="3312407"/>
+            <p:cNvPr id="104" name="pl104"/>
+            <p:cNvSpPr/>
+            <p:nvPr/>
+          </p:nvSpPr>
+          <p:spPr>
+            <a:xfrm>
+              <a:off x="5955366" y="3092951"/>
               <a:ext cx="175564" cy="0"/>
             </a:xfrm>
             <a:custGeom>
@@ -5406,13 +6234,13 @@
         </p:sp>
         <p:sp>
           <p:nvSpPr>
-            <p:cNvPr id="83" name="pt83"/>
-            <p:cNvSpPr/>
-            <p:nvPr/>
-          </p:nvSpPr>
-          <p:spPr>
-            <a:xfrm>
-              <a:off x="6986118" y="3275232"/>
+            <p:cNvPr id="105" name="pt105"/>
+            <p:cNvSpPr/>
+            <p:nvPr/>
+          </p:nvSpPr>
+          <p:spPr>
+            <a:xfrm>
+              <a:off x="6005973" y="3055776"/>
               <a:ext cx="74350" cy="74350"/>
             </a:xfrm>
             <a:prstGeom prst="ellipse">
@@ -5441,13 +6269,13 @@
         </p:sp>
         <p:sp>
           <p:nvSpPr>
-            <p:cNvPr id="84" name="pl84"/>
-            <p:cNvSpPr/>
-            <p:nvPr/>
-          </p:nvSpPr>
-          <p:spPr>
-            <a:xfrm>
-              <a:off x="6935511" y="3531863"/>
+            <p:cNvPr id="106" name="pl106"/>
+            <p:cNvSpPr/>
+            <p:nvPr/>
+          </p:nvSpPr>
+          <p:spPr>
+            <a:xfrm>
+              <a:off x="5955366" y="3312407"/>
               <a:ext cx="175564" cy="0"/>
             </a:xfrm>
             <a:custGeom>
@@ -5481,13 +6309,13 @@
         </p:sp>
         <p:sp>
           <p:nvSpPr>
-            <p:cNvPr id="85" name="pt85"/>
-            <p:cNvSpPr/>
-            <p:nvPr/>
-          </p:nvSpPr>
-          <p:spPr>
-            <a:xfrm>
-              <a:off x="6986118" y="3494688"/>
+            <p:cNvPr id="107" name="pt107"/>
+            <p:cNvSpPr/>
+            <p:nvPr/>
+          </p:nvSpPr>
+          <p:spPr>
+            <a:xfrm>
+              <a:off x="6005973" y="3275232"/>
               <a:ext cx="74350" cy="74350"/>
             </a:xfrm>
             <a:prstGeom prst="ellipse">
@@ -5516,13 +6344,13 @@
         </p:sp>
         <p:sp>
           <p:nvSpPr>
-            <p:cNvPr id="86" name="pl86"/>
-            <p:cNvSpPr/>
-            <p:nvPr/>
-          </p:nvSpPr>
-          <p:spPr>
-            <a:xfrm>
-              <a:off x="6935511" y="3751319"/>
+            <p:cNvPr id="108" name="pl108"/>
+            <p:cNvSpPr/>
+            <p:nvPr/>
+          </p:nvSpPr>
+          <p:spPr>
+            <a:xfrm>
+              <a:off x="5955366" y="3531863"/>
               <a:ext cx="175564" cy="0"/>
             </a:xfrm>
             <a:custGeom>
@@ -5556,13 +6384,13 @@
         </p:sp>
         <p:sp>
           <p:nvSpPr>
-            <p:cNvPr id="87" name="pt87"/>
-            <p:cNvSpPr/>
-            <p:nvPr/>
-          </p:nvSpPr>
-          <p:spPr>
-            <a:xfrm>
-              <a:off x="6986118" y="3714144"/>
+            <p:cNvPr id="109" name="pt109"/>
+            <p:cNvSpPr/>
+            <p:nvPr/>
+          </p:nvSpPr>
+          <p:spPr>
+            <a:xfrm>
+              <a:off x="6005973" y="3494688"/>
               <a:ext cx="74350" cy="74350"/>
             </a:xfrm>
             <a:prstGeom prst="ellipse">
@@ -5591,13 +6419,13 @@
         </p:sp>
         <p:sp>
           <p:nvSpPr>
-            <p:cNvPr id="88" name="pl88"/>
-            <p:cNvSpPr/>
-            <p:nvPr/>
-          </p:nvSpPr>
-          <p:spPr>
-            <a:xfrm>
-              <a:off x="6935511" y="3970775"/>
+            <p:cNvPr id="110" name="pl110"/>
+            <p:cNvSpPr/>
+            <p:nvPr/>
+          </p:nvSpPr>
+          <p:spPr>
+            <a:xfrm>
+              <a:off x="5955366" y="3751319"/>
               <a:ext cx="175564" cy="0"/>
             </a:xfrm>
             <a:custGeom>
@@ -5615,6 +6443,156 @@
             </a:custGeom>
             <a:ln w="35231" cap="flat">
               <a:solidFill>
+                <a:srgbClr val="E7298A">
+                  <a:alpha val="100000"/>
+                </a:srgbClr>
+              </a:solidFill>
+              <a:prstDash val="solid"/>
+              <a:round/>
+            </a:ln>
+          </p:spPr>
+          <p:txBody>
+            <a:bodyPr/>
+            <a:lstStyle/>
+            <a:p/>
+          </p:txBody>
+        </p:sp>
+        <p:sp>
+          <p:nvSpPr>
+            <p:cNvPr id="111" name="pt111"/>
+            <p:cNvSpPr/>
+            <p:nvPr/>
+          </p:nvSpPr>
+          <p:spPr>
+            <a:xfrm>
+              <a:off x="6005973" y="3714144"/>
+              <a:ext cx="74350" cy="74350"/>
+            </a:xfrm>
+            <a:prstGeom prst="ellipse">
+              <a:avLst/>
+            </a:prstGeom>
+            <a:solidFill>
+              <a:srgbClr val="E7298A">
+                <a:alpha val="100000"/>
+              </a:srgbClr>
+            </a:solidFill>
+            <a:ln w="14727" cap="rnd">
+              <a:solidFill>
+                <a:srgbClr val="E7298A">
+                  <a:alpha val="100000"/>
+                </a:srgbClr>
+              </a:solidFill>
+              <a:prstDash val="solid"/>
+              <a:round/>
+            </a:ln>
+          </p:spPr>
+          <p:txBody>
+            <a:bodyPr/>
+            <a:lstStyle/>
+            <a:p/>
+          </p:txBody>
+        </p:sp>
+        <p:sp>
+          <p:nvSpPr>
+            <p:cNvPr id="112" name="pl112"/>
+            <p:cNvSpPr/>
+            <p:nvPr/>
+          </p:nvSpPr>
+          <p:spPr>
+            <a:xfrm>
+              <a:off x="5955366" y="3970775"/>
+              <a:ext cx="175564" cy="0"/>
+            </a:xfrm>
+            <a:custGeom>
+              <a:avLst/>
+              <a:pathLst>
+                <a:path w="175564" h="0">
+                  <a:moveTo>
+                    <a:pt x="0" y="0"/>
+                  </a:moveTo>
+                  <a:lnTo>
+                    <a:pt x="175564" y="0"/>
+                  </a:lnTo>
+                </a:path>
+              </a:pathLst>
+            </a:custGeom>
+            <a:ln w="35231" cap="flat">
+              <a:solidFill>
+                <a:srgbClr val="F0C419">
+                  <a:alpha val="100000"/>
+                </a:srgbClr>
+              </a:solidFill>
+              <a:prstDash val="solid"/>
+              <a:round/>
+            </a:ln>
+          </p:spPr>
+          <p:txBody>
+            <a:bodyPr/>
+            <a:lstStyle/>
+            <a:p/>
+          </p:txBody>
+        </p:sp>
+        <p:sp>
+          <p:nvSpPr>
+            <p:cNvPr id="113" name="pt113"/>
+            <p:cNvSpPr/>
+            <p:nvPr/>
+          </p:nvSpPr>
+          <p:spPr>
+            <a:xfrm>
+              <a:off x="6005973" y="3933600"/>
+              <a:ext cx="74350" cy="74350"/>
+            </a:xfrm>
+            <a:prstGeom prst="ellipse">
+              <a:avLst/>
+            </a:prstGeom>
+            <a:solidFill>
+              <a:srgbClr val="F0C419">
+                <a:alpha val="100000"/>
+              </a:srgbClr>
+            </a:solidFill>
+            <a:ln w="14727" cap="rnd">
+              <a:solidFill>
+                <a:srgbClr val="F0C419">
+                  <a:alpha val="100000"/>
+                </a:srgbClr>
+              </a:solidFill>
+              <a:prstDash val="solid"/>
+              <a:round/>
+            </a:ln>
+          </p:spPr>
+          <p:txBody>
+            <a:bodyPr/>
+            <a:lstStyle/>
+            <a:p/>
+          </p:txBody>
+        </p:sp>
+        <p:sp>
+          <p:nvSpPr>
+            <p:cNvPr id="114" name="pl114"/>
+            <p:cNvSpPr/>
+            <p:nvPr/>
+          </p:nvSpPr>
+          <p:spPr>
+            <a:xfrm>
+              <a:off x="5955366" y="4190231"/>
+              <a:ext cx="175564" cy="0"/>
+            </a:xfrm>
+            <a:custGeom>
+              <a:avLst/>
+              <a:pathLst>
+                <a:path w="175564" h="0">
+                  <a:moveTo>
+                    <a:pt x="0" y="0"/>
+                  </a:moveTo>
+                  <a:lnTo>
+                    <a:pt x="175564" y="0"/>
+                  </a:lnTo>
+                </a:path>
+              </a:pathLst>
+            </a:custGeom>
+            <a:ln w="35231" cap="flat">
+              <a:solidFill>
                 <a:srgbClr val="D2B48C">
                   <a:alpha val="100000"/>
                 </a:srgbClr>
@@ -5631,13 +6609,13 @@
         </p:sp>
         <p:sp>
           <p:nvSpPr>
-            <p:cNvPr id="89" name="pt89"/>
-            <p:cNvSpPr/>
-            <p:nvPr/>
-          </p:nvSpPr>
-          <p:spPr>
-            <a:xfrm>
-              <a:off x="6986118" y="3933600"/>
+            <p:cNvPr id="115" name="pt115"/>
+            <p:cNvSpPr/>
+            <p:nvPr/>
+          </p:nvSpPr>
+          <p:spPr>
+            <a:xfrm>
+              <a:off x="6005973" y="4153056"/>
               <a:ext cx="74350" cy="74350"/>
             </a:xfrm>
             <a:prstGeom prst="ellipse">
@@ -5666,13 +6644,13 @@
         </p:sp>
         <p:sp>
           <p:nvSpPr>
-            <p:cNvPr id="90" name="tx90"/>
-            <p:cNvSpPr/>
-            <p:nvPr/>
-          </p:nvSpPr>
-          <p:spPr>
-            <a:xfrm>
-              <a:off x="7246894" y="3245793"/>
+            <p:cNvPr id="116" name="tx116"/>
+            <p:cNvSpPr/>
+            <p:nvPr/>
+          </p:nvSpPr>
+          <p:spPr>
+            <a:xfrm>
+              <a:off x="6266749" y="3026337"/>
               <a:ext cx="1360444" cy="133228"/>
             </a:xfrm>
             <a:prstGeom prst="rect">
@@ -5709,14 +6687,14 @@
         </p:sp>
         <p:sp>
           <p:nvSpPr>
-            <p:cNvPr id="91" name="tx91"/>
-            <p:cNvSpPr/>
-            <p:nvPr/>
-          </p:nvSpPr>
-          <p:spPr>
-            <a:xfrm>
-              <a:off x="7246894" y="3465249"/>
-              <a:ext cx="4107759" cy="133228"/>
+            <p:cNvPr id="117" name="tx117"/>
+            <p:cNvSpPr/>
+            <p:nvPr/>
+          </p:nvSpPr>
+          <p:spPr>
+            <a:xfrm>
+              <a:off x="6266749" y="3245793"/>
+              <a:ext cx="5087904" cy="133228"/>
             </a:xfrm>
             <a:prstGeom prst="rect">
               <a:avLst/>
@@ -5745,20 +6723,20 @@
                   <a:latin typeface="DejaVu Sans"/>
                   <a:cs typeface="DejaVu Sans"/>
                 </a:rPr>
-                <a:t>TRG → The Nature Conservancy (Heartlands)</a:t>
+                <a:t>TRG → Verdant → The Nature Conservancy (Heartlands)</a:t>
               </a:r>
             </a:p>
           </p:txBody>
         </p:sp>
         <p:sp>
           <p:nvSpPr>
-            <p:cNvPr id="92" name="tx92"/>
-            <p:cNvSpPr/>
-            <p:nvPr/>
-          </p:nvSpPr>
-          <p:spPr>
-            <a:xfrm>
-              <a:off x="7246894" y="3684705"/>
+            <p:cNvPr id="118" name="tx118"/>
+            <p:cNvSpPr/>
+            <p:nvPr/>
+          </p:nvSpPr>
+          <p:spPr>
+            <a:xfrm>
+              <a:off x="6266749" y="3465249"/>
               <a:ext cx="4038081" cy="133228"/>
             </a:xfrm>
             <a:prstGeom prst="rect">
@@ -5795,14 +6773,14 @@
         </p:sp>
         <p:sp>
           <p:nvSpPr>
-            <p:cNvPr id="93" name="tx93"/>
-            <p:cNvSpPr/>
-            <p:nvPr/>
-          </p:nvSpPr>
-          <p:spPr>
-            <a:xfrm>
-              <a:off x="7246894" y="3904161"/>
-              <a:ext cx="2613263" cy="133228"/>
+            <p:cNvPr id="119" name="tx119"/>
+            <p:cNvSpPr/>
+            <p:nvPr/>
+          </p:nvSpPr>
+          <p:spPr>
+            <a:xfrm>
+              <a:off x="6266749" y="3684705"/>
+              <a:ext cx="2132655" cy="133228"/>
             </a:xfrm>
             <a:prstGeom prst="rect">
               <a:avLst/>
@@ -5831,14 +6809,100 @@
                   <a:latin typeface="DejaVu Sans"/>
                   <a:cs typeface="DejaVu Sans"/>
                 </a:rPr>
-                <a:t>Other private → same owner</a:t>
+                <a:t>Molpus → kept (mostly)</a:t>
               </a:r>
             </a:p>
           </p:txBody>
         </p:sp>
         <p:sp>
           <p:nvSpPr>
-            <p:cNvPr id="94" name="tx94"/>
+            <p:cNvPr id="120" name="tx120"/>
+            <p:cNvSpPr/>
+            <p:nvPr/>
+          </p:nvSpPr>
+          <p:spPr>
+            <a:xfrm>
+              <a:off x="6266749" y="3904161"/>
+              <a:ext cx="1152692" cy="133228"/>
+            </a:xfrm>
+            <a:prstGeom prst="rect">
+              <a:avLst/>
+            </a:prstGeom>
+            <a:noFill/>
+          </p:spPr>
+          <p:txBody>
+            <a:bodyPr lIns="0" rIns="0" tIns="0" bIns="0" anchorCtr="1" anchor="ctr" wrap="none"/>
+            <a:lstStyle/>
+            <a:p>
+              <a:pPr algn="l" marL="0" marR="0" indent="0">
+                <a:spcBef>
+                  <a:spcPts val="0"/>
+                </a:spcBef>
+                <a:spcAft>
+                  <a:spcPts val="0"/>
+                </a:spcAft>
+              </a:pPr>
+              <a:r>
+                <a:rPr sz="1440" i="0" b="0">
+                  <a:solidFill>
+                    <a:srgbClr val="000000">
+                      <a:alpha val="100000"/>
+                    </a:srgbClr>
+                  </a:solidFill>
+                  <a:latin typeface="DejaVu Sans"/>
+                  <a:cs typeface="DejaVu Sans"/>
+                </a:rPr>
+                <a:t>Lyme → kept</a:t>
+              </a:r>
+            </a:p>
+          </p:txBody>
+        </p:sp>
+        <p:sp>
+          <p:nvSpPr>
+            <p:cNvPr id="121" name="tx121"/>
+            <p:cNvSpPr/>
+            <p:nvPr/>
+          </p:nvSpPr>
+          <p:spPr>
+            <a:xfrm>
+              <a:off x="6266749" y="4123617"/>
+              <a:ext cx="1892259" cy="133228"/>
+            </a:xfrm>
+            <a:prstGeom prst="rect">
+              <a:avLst/>
+            </a:prstGeom>
+            <a:noFill/>
+          </p:spPr>
+          <p:txBody>
+            <a:bodyPr lIns="0" rIns="0" tIns="0" bIns="0" anchorCtr="1" anchor="ctr" wrap="none"/>
+            <a:lstStyle/>
+            <a:p>
+              <a:pPr algn="l" marL="0" marR="0" indent="0">
+                <a:spcBef>
+                  <a:spcPts val="0"/>
+                </a:spcBef>
+                <a:spcAft>
+                  <a:spcPts val="0"/>
+                </a:spcAft>
+              </a:pPr>
+              <a:r>
+                <a:rPr sz="1440" i="0" b="0">
+                  <a:solidFill>
+                    <a:srgbClr val="000000">
+                      <a:alpha val="100000"/>
+                    </a:srgbClr>
+                  </a:solidFill>
+                  <a:latin typeface="DejaVu Sans"/>
+                  <a:cs typeface="DejaVu Sans"/>
+                </a:rPr>
+                <a:t>Other private → kept</a:t>
+              </a:r>
+            </a:p>
+          </p:txBody>
+        </p:sp>
+        <p:sp>
+          <p:nvSpPr>
+            <p:cNvPr id="122" name="tx122"/>
             <p:cNvSpPr/>
             <p:nvPr/>
           </p:nvSpPr>
@@ -5881,7 +6945,7 @@
         </p:sp>
         <p:sp>
           <p:nvSpPr>
-            <p:cNvPr id="95" name="tx95"/>
+            <p:cNvPr id="123" name="tx123"/>
             <p:cNvSpPr/>
             <p:nvPr/>
           </p:nvSpPr>
